--- a/apps/demo/public/betteroffice-demo.pptx
+++ b/apps/demo/public/betteroffice-demo.pptx
@@ -52,14 +52,36 @@
       <p:grpSpPr/>
       <p:sp>
         <p:nvSpPr>
-          <p:cNvPr id="2" name="Brand"/>
+          <p:cNvPr id="2" name="Footer rule"/>
+          <p:cNvSpPr/>
+          <p:nvPr/>
+        </p:nvSpPr>
+        <p:spPr>
+          <a:xfrm>
+            <a:off x="762000" y="6248400"/>
+            <a:ext cx="10668000" cy="15240"/>
+          </a:xfrm>
+          <a:prstGeom prst="rect">
+            <a:avLst/>
+          </a:prstGeom>
+          <a:solidFill>
+            <a:srgbClr val="D0D5DD"/>
+          </a:solidFill>
+          <a:ln>
+            <a:noFill/>
+          </a:ln>
+        </p:spPr>
+      </p:sp>
+      <p:sp>
+        <p:nvSpPr>
+          <p:cNvPr id="3" name="Brand"/>
           <p:cNvSpPr txBox="1"/>
           <p:nvPr/>
         </p:nvSpPr>
         <p:spPr>
           <a:xfrm>
-            <a:off x="762000" y="6400800"/>
-            <a:ext cx="10668000" cy="228600"/>
+            <a:off x="762000" y="6324600"/>
+            <a:ext cx="3048000" cy="381000"/>
           </a:xfrm>
           <a:prstGeom prst="rect">
             <a:avLst/>
@@ -77,11 +99,48 @@
             <a:r>
               <a:rPr lang="en-US" sz="900" b="1">
                 <a:solidFill>
-                  <a:srgbClr val="6254E7"/>
-                </a:solidFill>
-                <a:latin typeface="Inter"/>
+                  <a:srgbClr val="101828"/>
+                </a:solidFill>
+                <a:latin typeface="Arial"/>
               </a:rPr>
               <a:t>betteroffice</a:t>
+            </a:r>
+            <a:endParaRPr lang="en-US" sz="1800"/>
+          </a:p>
+        </p:txBody>
+      </p:sp>
+      <p:sp>
+        <p:nvSpPr>
+          <p:cNvPr id="4" name="Open OOXML label"/>
+          <p:cNvSpPr txBox="1"/>
+          <p:nvPr/>
+        </p:nvSpPr>
+        <p:spPr>
+          <a:xfrm>
+            <a:off x="8382000" y="6324600"/>
+            <a:ext cx="3048000" cy="381000"/>
+          </a:xfrm>
+          <a:prstGeom prst="rect">
+            <a:avLst/>
+          </a:prstGeom>
+          <a:noFill/>
+          <a:ln>
+            <a:noFill/>
+          </a:ln>
+        </p:spPr>
+        <p:txBody>
+          <a:bodyPr wrap="square" lIns="152400" tIns="91440" rIns="152400" bIns="91440" anchor="t"/>
+          <a:lstStyle/>
+          <a:p>
+            <a:pPr algn="r" lvl="0"/>
+            <a:r>
+              <a:rPr lang="en-US" sz="800" b="1">
+                <a:solidFill>
+                  <a:srgbClr val="667085"/>
+                </a:solidFill>
+                <a:latin typeface="Arial"/>
+              </a:rPr>
+              <a:t>OPEN OOXML  /  LOCAL-FIRST</a:t>
             </a:r>
             <a:endParaRPr lang="en-US" sz="1800"/>
           </a:p>
@@ -89,8 +148,9 @@
       </p:sp>
     </p:spTree>
   </p:cSld>
+  <p:clrMap accent1="accent1" accent2="accent2" accent3="accent3" accent4="accent4" accent5="accent5" accent6="accent6" hlink="hlink" folHlink="folHlink" bg1="lt1" tx1="dk1" bg2="lt2" tx2="dk2"/>
   <p:sldLayoutIdLst>
-    <p:sldLayoutId id="1" r:id="rId1"/>
+    <p:sldLayoutId id="2147483649" r:id="rId1"/>
   </p:sldLayoutIdLst>
   <p:txStyles>
     <p:titleStyle>
@@ -131,7 +191,7 @@
     <p:bg>
       <p:bgPr>
         <a:solidFill>
-          <a:srgbClr val="241E52"/>
+          <a:srgbClr val="F8F7F2"/>
         </a:solidFill>
         <a:effectLst/>
       </p:bgPr>
@@ -152,14 +212,75 @@
       </p:grpSpPr>
       <p:sp>
         <p:nvSpPr>
-          <p:cNvPr id="2" name="Title"/>
+          <p:cNvPr id="2" name="Cobalt rail"/>
+          <p:cNvSpPr/>
+          <p:nvPr/>
+        </p:nvSpPr>
+        <p:spPr>
+          <a:xfrm>
+            <a:off x="0" y="0"/>
+            <a:ext cx="228600" cy="6858000"/>
+          </a:xfrm>
+          <a:prstGeom prst="rect">
+            <a:avLst/>
+          </a:prstGeom>
+          <a:solidFill>
+            <a:srgbClr val="315EFB"/>
+          </a:solidFill>
+          <a:ln>
+            <a:noFill/>
+          </a:ln>
+        </p:spPr>
+      </p:sp>
+      <p:sp>
+        <p:nvSpPr>
+          <p:cNvPr id="3" name="Deck label"/>
           <p:cNvSpPr txBox="1"/>
           <p:nvPr/>
         </p:nvSpPr>
         <p:spPr>
           <a:xfrm>
-            <a:off x="914400" y="1066800"/>
-            <a:ext cx="9144000" cy="1524000"/>
+            <a:off x="762000" y="533400"/>
+            <a:ext cx="2971800" cy="426720"/>
+          </a:xfrm>
+          <a:prstGeom prst="roundRect">
+            <a:avLst/>
+          </a:prstGeom>
+          <a:solidFill>
+            <a:srgbClr val="101828"/>
+          </a:solidFill>
+          <a:ln>
+            <a:noFill/>
+          </a:ln>
+        </p:spPr>
+        <p:txBody>
+          <a:bodyPr wrap="square" lIns="152400" tIns="91440" rIns="152400" bIns="91440" anchor="ctr"/>
+          <a:lstStyle/>
+          <a:p>
+            <a:pPr algn="ctr" lvl="0"/>
+            <a:r>
+              <a:rPr lang="en-US" sz="900" b="1">
+                <a:solidFill>
+                  <a:srgbClr val="FFFFFF"/>
+                </a:solidFill>
+                <a:latin typeface="Arial"/>
+              </a:rPr>
+              <a:t>BETTEROFFICE  /  OPEN OOXML</a:t>
+            </a:r>
+            <a:endParaRPr lang="en-US" sz="1800"/>
+          </a:p>
+        </p:txBody>
+      </p:sp>
+      <p:sp>
+        <p:nvSpPr>
+          <p:cNvPr id="4" name="Title"/>
+          <p:cNvSpPr txBox="1"/>
+          <p:nvPr/>
+        </p:nvSpPr>
+        <p:spPr>
+          <a:xfrm>
+            <a:off x="762000" y="1219200"/>
+            <a:ext cx="6096000" cy="1981200"/>
           </a:xfrm>
           <a:prstGeom prst="rect">
             <a:avLst/>
@@ -175,13 +296,26 @@
           <a:p>
             <a:pPr algn="l" lvl="0"/>
             <a:r>
-              <a:rPr lang="en-US" sz="4000" b="1">
-                <a:solidFill>
-                  <a:srgbClr val="FFFFFF"/>
-                </a:solidFill>
-                <a:latin typeface="Inter"/>
-              </a:rPr>
-              <a:t>PPTX, the third format</a:t>
+              <a:rPr lang="en-US" sz="4400" b="1">
+                <a:solidFill>
+                  <a:srgbClr val="101828"/>
+                </a:solidFill>
+                <a:latin typeface="Arial"/>
+              </a:rPr>
+              <a:t>Office files,</a:t>
+            </a:r>
+            <a:endParaRPr lang="en-US" sz="1800"/>
+          </a:p>
+          <a:p>
+            <a:pPr algn="l" lvl="0"/>
+            <a:r>
+              <a:rPr lang="en-US" sz="4400" b="1">
+                <a:solidFill>
+                  <a:srgbClr val="315EFB"/>
+                </a:solidFill>
+                <a:latin typeface="Arial"/>
+              </a:rPr>
+              <a:t>without the office.</a:t>
             </a:r>
             <a:endParaRPr lang="en-US" sz="1800"/>
           </a:p>
@@ -189,14 +323,14 @@
       </p:sp>
       <p:sp>
         <p:nvSpPr>
-          <p:cNvPr id="3" name="Subtitle"/>
+          <p:cNvPr id="5" name="Subtitle"/>
           <p:cNvSpPr txBox="1"/>
           <p:nvPr/>
         </p:nvSpPr>
         <p:spPr>
           <a:xfrm>
-            <a:off x="914400" y="2667000"/>
-            <a:ext cx="8382000" cy="1219200"/>
+            <a:off x="762000" y="3276600"/>
+            <a:ext cx="5715000" cy="1066800"/>
           </a:xfrm>
           <a:prstGeom prst="rect">
             <a:avLst/>
@@ -212,13 +346,13 @@
           <a:p>
             <a:pPr algn="l" lvl="0"/>
             <a:r>
-              <a:rPr lang="en-US" sz="2000">
-                <a:solidFill>
-                  <a:srgbClr val="D9D5FF"/>
-                </a:solidFill>
-                <a:latin typeface="Inter"/>
-              </a:rPr>
-              <a:t>A Rust engine from guarded package parts to every collaborative pixel.</a:t>
+              <a:rPr lang="en-US" sz="1700">
+                <a:solidFill>
+                  <a:srgbClr val="475467"/>
+                </a:solidFill>
+                <a:latin typeface="Arial"/>
+              </a:rPr>
+              <a:t>A Rust-native editing engine for DOCX, XLSX, and PPTX. Local-first, collaborative, and entirely yours.</a:t>
             </a:r>
             <a:endParaRPr lang="en-US" sz="1800"/>
           </a:p>
@@ -226,20 +360,20 @@
       </p:sp>
       <p:sp>
         <p:nvSpPr>
-          <p:cNvPr id="4" name="Architecture note"/>
+          <p:cNvPr id="6" name="WASM label"/>
           <p:cNvSpPr txBox="1"/>
           <p:nvPr/>
         </p:nvSpPr>
         <p:spPr>
           <a:xfrm>
-            <a:off x="914400" y="3733800"/>
-            <a:ext cx="8382000" cy="762000"/>
+            <a:off x="762000" y="4572000"/>
+            <a:ext cx="1188720" cy="487680"/>
           </a:xfrm>
           <a:prstGeom prst="roundRect">
             <a:avLst/>
           </a:prstGeom>
           <a:solidFill>
-            <a:srgbClr val="4A3FB5"/>
+            <a:srgbClr val="C8F56A"/>
           </a:solidFill>
           <a:ln>
             <a:noFill/>
@@ -249,78 +383,430 @@
           <a:bodyPr wrap="square" lIns="152400" tIns="91440" rIns="152400" bIns="91440" anchor="ctr"/>
           <a:lstStyle/>
           <a:p>
-            <a:pPr algn="l" lvl="0"/>
-            <a:r>
-              <a:rPr lang="en-US" sz="1600" b="1">
+            <a:pPr algn="ctr" lvl="0"/>
+            <a:r>
+              <a:rPr lang="en-US" sz="900" b="1">
+                <a:solidFill>
+                  <a:srgbClr val="101828"/>
+                </a:solidFill>
+                <a:latin typeface="Arial"/>
+              </a:rPr>
+              <a:t>WASM</a:t>
+            </a:r>
+            <a:endParaRPr lang="en-US" sz="1800"/>
+          </a:p>
+        </p:txBody>
+      </p:sp>
+      <p:sp>
+        <p:nvSpPr>
+          <p:cNvPr id="7" name="CRDT label"/>
+          <p:cNvSpPr txBox="1"/>
+          <p:nvPr/>
+        </p:nvSpPr>
+        <p:spPr>
+          <a:xfrm>
+            <a:off x="2096760" y="4572000"/>
+            <a:ext cx="1188720" cy="487680"/>
+          </a:xfrm>
+          <a:prstGeom prst="roundRect">
+            <a:avLst/>
+          </a:prstGeom>
+          <a:solidFill>
+            <a:srgbClr val="FFD166"/>
+          </a:solidFill>
+          <a:ln>
+            <a:noFill/>
+          </a:ln>
+        </p:spPr>
+        <p:txBody>
+          <a:bodyPr wrap="square" lIns="152400" tIns="91440" rIns="152400" bIns="91440" anchor="ctr"/>
+          <a:lstStyle/>
+          <a:p>
+            <a:pPr algn="ctr" lvl="0"/>
+            <a:r>
+              <a:rPr lang="en-US" sz="900" b="1">
+                <a:solidFill>
+                  <a:srgbClr val="101828"/>
+                </a:solidFill>
+                <a:latin typeface="Arial"/>
+              </a:rPr>
+              <a:t>CRDT</a:t>
+            </a:r>
+            <a:endParaRPr lang="en-US" sz="1800"/>
+          </a:p>
+        </p:txBody>
+      </p:sp>
+      <p:sp>
+        <p:nvSpPr>
+          <p:cNvPr id="8" name="No uploads label"/>
+          <p:cNvSpPr txBox="1"/>
+          <p:nvPr/>
+        </p:nvSpPr>
+        <p:spPr>
+          <a:xfrm>
+            <a:off x="3431520" y="4572000"/>
+            <a:ext cx="1752600" cy="487680"/>
+          </a:xfrm>
+          <a:prstGeom prst="roundRect">
+            <a:avLst/>
+          </a:prstGeom>
+          <a:solidFill>
+            <a:srgbClr val="101828"/>
+          </a:solidFill>
+          <a:ln>
+            <a:noFill/>
+          </a:ln>
+        </p:spPr>
+        <p:txBody>
+          <a:bodyPr wrap="square" lIns="152400" tIns="91440" rIns="152400" bIns="91440" anchor="ctr"/>
+          <a:lstStyle/>
+          <a:p>
+            <a:pPr algn="ctr" lvl="0"/>
+            <a:r>
+              <a:rPr lang="en-US" sz="900" b="1">
                 <a:solidFill>
                   <a:srgbClr val="FFFFFF"/>
                 </a:solidFill>
-                <a:latin typeface="Inter"/>
-              </a:rPr>
-              <a:t>Parse · edit · shape · lay out · emit</a:t>
+                <a:latin typeface="Arial"/>
+              </a:rPr>
+              <a:t>NO UPLOADS</a:t>
             </a:r>
             <a:endParaRPr lang="en-US" sz="1800"/>
           </a:p>
         </p:txBody>
       </p:sp>
-      <p:pic>
-        <p:nvPicPr>
-          <p:cNvPr id="5" name="BetterOffice mark" descr="BetterOffice brand mark"/>
-          <p:cNvPicPr>
-            <a:picLocks noChangeAspect="1"/>
-          </p:cNvPicPr>
-          <p:nvPr/>
-        </p:nvPicPr>
-        <p:blipFill>
-          <a:blip r:embed="rId2"/>
-          <a:srcRect/>
-          <a:stretch>
-            <a:fillRect/>
-          </a:stretch>
-        </p:blipFill>
-        <p:spPr>
-          <a:xfrm>
-            <a:off x="10058400" y="609600"/>
-            <a:ext cx="914400" cy="914400"/>
-          </a:xfrm>
-          <a:prstGeom prst="roundRect">
-            <a:avLst/>
-          </a:prstGeom>
-          <a:ln>
-            <a:noFill/>
-          </a:ln>
-        </p:spPr>
-      </p:pic>
+      <p:sp>
+        <p:nvSpPr>
+          <p:cNvPr id="9" name="Cover statement"/>
+          <p:cNvSpPr txBox="1"/>
+          <p:nvPr/>
+        </p:nvSpPr>
+        <p:spPr>
+          <a:xfrm>
+            <a:off x="762000" y="5334000"/>
+            <a:ext cx="5334000" cy="609600"/>
+          </a:xfrm>
+          <a:prstGeom prst="rect">
+            <a:avLst/>
+          </a:prstGeom>
+          <a:noFill/>
+          <a:ln>
+            <a:noFill/>
+          </a:ln>
+        </p:spPr>
+        <p:txBody>
+          <a:bodyPr wrap="square" lIns="152400" tIns="91440" rIns="152400" bIns="91440" anchor="t"/>
+          <a:lstStyle/>
+          <a:p>
+            <a:pPr algn="l" lvl="0"/>
+            <a:r>
+              <a:rPr lang="en-US" sz="1100" b="1">
+                <a:solidFill>
+                  <a:srgbClr val="667085"/>
+                </a:solidFill>
+                <a:latin typeface="Arial"/>
+              </a:rPr>
+              <a:t>Parse. Edit. Collaborate. Render. All in one resident model.</a:t>
+            </a:r>
+            <a:endParaRPr lang="en-US" sz="1800"/>
+          </a:p>
+        </p:txBody>
+      </p:sp>
       <p:grpSp>
         <p:nvGrpSpPr>
-          <p:cNvPr id="6" name="Native pipeline"/>
+          <p:cNvPr id="10" name="BetterOffice editor preview"/>
           <p:cNvGrpSpPr/>
           <p:nvPr/>
         </p:nvGrpSpPr>
         <p:grpSpPr>
           <a:xfrm>
-            <a:off x="914400" y="4876800"/>
-            <a:ext cx="10363200" cy="914400"/>
+            <a:off x="7112000" y="610000"/>
+            <a:ext cx="4320000" cy="5480000"/>
             <a:chOff x="0" y="0"/>
-            <a:chExt cx="10363200" cy="914400"/>
+            <a:chExt cx="4320000" cy="5480000"/>
           </a:xfrm>
         </p:grpSpPr>
         <p:sp>
           <p:nvSpPr>
-            <p:cNvPr id="7" name="Parse stage"/>
+            <p:cNvPr id="11" name="Preview field"/>
+            <p:cNvSpPr/>
+            <p:nvPr/>
+          </p:nvSpPr>
+          <p:spPr>
+            <a:xfrm>
+              <a:off x="0" y="0"/>
+              <a:ext cx="4320000" cy="5480000"/>
+            </a:xfrm>
+            <a:prstGeom prst="roundRect">
+              <a:avLst/>
+            </a:prstGeom>
+            <a:solidFill>
+              <a:srgbClr val="E6EBFF"/>
+            </a:solidFill>
+            <a:ln>
+              <a:noFill/>
+            </a:ln>
+          </p:spPr>
+        </p:sp>
+        <p:sp>
+          <p:nvSpPr>
+            <p:cNvPr id="12" name="Preview accent"/>
+            <p:cNvSpPr/>
+            <p:nvPr/>
+          </p:nvSpPr>
+          <p:spPr>
+            <a:xfrm>
+              <a:off x="3100000" y="0"/>
+              <a:ext cx="1220000" cy="5480000"/>
+            </a:xfrm>
+            <a:prstGeom prst="roundRect">
+              <a:avLst/>
+            </a:prstGeom>
+            <a:solidFill>
+              <a:srgbClr val="315EFB"/>
+            </a:solidFill>
+            <a:ln>
+              <a:noFill/>
+            </a:ln>
+          </p:spPr>
+        </p:sp>
+        <p:sp>
+          <p:nvSpPr>
+            <p:cNvPr id="13" name="Editor window"/>
+            <p:cNvSpPr/>
+            <p:nvPr/>
+          </p:nvSpPr>
+          <p:spPr>
+            <a:xfrm>
+              <a:off x="360000" y="520000"/>
+              <a:ext cx="3380000" cy="3860000"/>
+            </a:xfrm>
+            <a:prstGeom prst="roundRect">
+              <a:avLst/>
+            </a:prstGeom>
+            <a:solidFill>
+              <a:srgbClr val="FFFFFF"/>
+            </a:solidFill>
+            <a:ln w="19050">
+              <a:solidFill>
+                <a:srgbClr val="C7D1FF"/>
+              </a:solidFill>
+            </a:ln>
+          </p:spPr>
+        </p:sp>
+        <p:sp>
+          <p:nvSpPr>
+            <p:cNvPr id="14" name="Window dot coral"/>
+            <p:cNvSpPr/>
+            <p:nvPr/>
+          </p:nvSpPr>
+          <p:spPr>
+            <a:xfrm>
+              <a:off x="620000" y="760000"/>
+              <a:ext cx="105000" cy="105000"/>
+            </a:xfrm>
+            <a:prstGeom prst="ellipse">
+              <a:avLst/>
+            </a:prstGeom>
+            <a:solidFill>
+              <a:srgbClr val="FF8066"/>
+            </a:solidFill>
+            <a:ln>
+              <a:noFill/>
+            </a:ln>
+          </p:spPr>
+        </p:sp>
+        <p:sp>
+          <p:nvSpPr>
+            <p:cNvPr id="15" name="Window dot gold"/>
+            <p:cNvSpPr/>
+            <p:nvPr/>
+          </p:nvSpPr>
+          <p:spPr>
+            <a:xfrm>
+              <a:off x="780000" y="760000"/>
+              <a:ext cx="105000" cy="105000"/>
+            </a:xfrm>
+            <a:prstGeom prst="ellipse">
+              <a:avLst/>
+            </a:prstGeom>
+            <a:solidFill>
+              <a:srgbClr val="F9C74F"/>
+            </a:solidFill>
+            <a:ln>
+              <a:noFill/>
+            </a:ln>
+          </p:spPr>
+        </p:sp>
+        <p:sp>
+          <p:nvSpPr>
+            <p:cNvPr id="16" name="Window dot mint"/>
+            <p:cNvSpPr/>
+            <p:nvPr/>
+          </p:nvSpPr>
+          <p:spPr>
+            <a:xfrm>
+              <a:off x="940000" y="760000"/>
+              <a:ext cx="105000" cy="105000"/>
+            </a:xfrm>
+            <a:prstGeom prst="ellipse">
+              <a:avLst/>
+            </a:prstGeom>
+            <a:solidFill>
+              <a:srgbClr val="48C78E"/>
+            </a:solidFill>
+            <a:ln>
+              <a:noFill/>
+            </a:ln>
+          </p:spPr>
+        </p:sp>
+        <p:sp>
+          <p:nvSpPr>
+            <p:cNvPr id="17" name="Window address"/>
             <p:cNvSpPr txBox="1"/>
             <p:nvPr/>
           </p:nvSpPr>
           <p:spPr>
             <a:xfrm>
-              <a:off x="0" y="0"/>
-              <a:ext cx="2377440" cy="914400"/>
+              <a:off x="1160000" y="690000"/>
+              <a:ext cx="2080000" cy="260000"/>
+            </a:xfrm>
+            <a:prstGeom prst="rect">
+              <a:avLst/>
+            </a:prstGeom>
+            <a:noFill/>
+            <a:ln>
+              <a:noFill/>
+            </a:ln>
+          </p:spPr>
+          <p:txBody>
+            <a:bodyPr wrap="square" lIns="152400" tIns="91440" rIns="152400" bIns="91440" anchor="ctr"/>
+            <a:lstStyle/>
+            <a:p>
+              <a:pPr algn="l" lvl="0"/>
+              <a:r>
+                <a:rPr lang="en-US" sz="820" b="1">
+                  <a:solidFill>
+                    <a:srgbClr val="667085"/>
+                  </a:solidFill>
+                  <a:latin typeface="Arial"/>
+                </a:rPr>
+                <a:t>betteroffice.dev / deck.pptx</a:t>
+              </a:r>
+              <a:endParaRPr lang="en-US" sz="1800"/>
+            </a:p>
+          </p:txBody>
+        </p:sp>
+        <p:sp>
+          <p:nvSpPr>
+            <p:cNvPr id="18" name="Preview title"/>
+            <p:cNvSpPr txBox="1"/>
+            <p:nvPr/>
+          </p:nvSpPr>
+          <p:spPr>
+            <a:xfrm>
+              <a:off x="650000" y="1320000"/>
+              <a:ext cx="2550000" cy="980000"/>
+            </a:xfrm>
+            <a:prstGeom prst="rect">
+              <a:avLst/>
+            </a:prstGeom>
+            <a:noFill/>
+            <a:ln>
+              <a:noFill/>
+            </a:ln>
+          </p:spPr>
+          <p:txBody>
+            <a:bodyPr wrap="square" lIns="152400" tIns="91440" rIns="152400" bIns="91440" anchor="t"/>
+            <a:lstStyle/>
+            <a:p>
+              <a:pPr algn="l" lvl="0"/>
+              <a:r>
+                <a:rPr lang="en-US" sz="2100" b="1">
+                  <a:solidFill>
+                    <a:srgbClr val="101828"/>
+                  </a:solidFill>
+                  <a:latin typeface="Arial"/>
+                </a:rPr>
+                <a:t>Ship ideas,</a:t>
+              </a:r>
+              <a:endParaRPr lang="en-US" sz="1800"/>
+            </a:p>
+            <a:p>
+              <a:pPr algn="l" lvl="0"/>
+              <a:r>
+                <a:rPr lang="en-US" sz="2100" b="1">
+                  <a:solidFill>
+                    <a:srgbClr val="315EFB"/>
+                  </a:solidFill>
+                  <a:latin typeface="Arial"/>
+                </a:rPr>
+                <a:t>not attachments.</a:t>
+              </a:r>
+              <a:endParaRPr lang="en-US" sz="1800"/>
+            </a:p>
+          </p:txBody>
+        </p:sp>
+        <p:sp>
+          <p:nvSpPr>
+            <p:cNvPr id="19" name="Preview rule one"/>
+            <p:cNvSpPr/>
+            <p:nvPr/>
+          </p:nvSpPr>
+          <p:spPr>
+            <a:xfrm>
+              <a:off x="650000" y="2520000"/>
+              <a:ext cx="2220000" cy="105000"/>
             </a:xfrm>
             <a:prstGeom prst="roundRect">
               <a:avLst/>
             </a:prstGeom>
             <a:solidFill>
-              <a:srgbClr val="6254E7"/>
+              <a:srgbClr val="D0D5DD"/>
+            </a:solidFill>
+            <a:ln>
+              <a:noFill/>
+            </a:ln>
+          </p:spPr>
+        </p:sp>
+        <p:sp>
+          <p:nvSpPr>
+            <p:cNvPr id="20" name="Preview rule two"/>
+            <p:cNvSpPr/>
+            <p:nvPr/>
+          </p:nvSpPr>
+          <p:spPr>
+            <a:xfrm>
+              <a:off x="650000" y="2770000"/>
+              <a:ext cx="1670000" cy="105000"/>
+            </a:xfrm>
+            <a:prstGeom prst="roundRect">
+              <a:avLst/>
+            </a:prstGeom>
+            <a:solidFill>
+              <a:srgbClr val="D0D5DD"/>
+            </a:solidFill>
+            <a:ln>
+              <a:noFill/>
+            </a:ln>
+          </p:spPr>
+        </p:sp>
+        <p:sp>
+          <p:nvSpPr>
+            <p:cNvPr id="21" name="Local badge"/>
+            <p:cNvSpPr txBox="1"/>
+            <p:nvPr/>
+          </p:nvSpPr>
+          <p:spPr>
+            <a:xfrm>
+              <a:off x="650000" y="3230000"/>
+              <a:ext cx="1550000" cy="520000"/>
+            </a:xfrm>
+            <a:prstGeom prst="roundRect">
+              <a:avLst/>
+            </a:prstGeom>
+            <a:solidFill>
+              <a:srgbClr val="C8F56A"/>
             </a:solidFill>
             <a:ln>
               <a:noFill/>
@@ -332,13 +818,13 @@
             <a:p>
               <a:pPr algn="ctr" lvl="0"/>
               <a:r>
-                <a:rPr lang="en-US" sz="1500" b="1">
+                <a:rPr lang="en-US" sz="900" b="1">
                   <a:solidFill>
-                    <a:srgbClr val="FFFFFF"/>
+                    <a:srgbClr val="101828"/>
                   </a:solidFill>
-                  <a:latin typeface="Inter"/>
+                  <a:latin typeface="Arial"/>
                 </a:rPr>
-                <a:t>Parse</a:t>
+                <a:t>LOCAL-FIRST</a:t>
               </a:r>
               <a:endParaRPr lang="en-US" sz="1800"/>
             </a:p>
@@ -346,20 +832,20 @@
         </p:sp>
         <p:sp>
           <p:nvSpPr>
-            <p:cNvPr id="8" name="Collaborate stage"/>
+            <p:cNvPr id="22" name="DOCX tab"/>
             <p:cNvSpPr txBox="1"/>
             <p:nvPr/>
           </p:nvSpPr>
           <p:spPr>
             <a:xfrm>
-              <a:off x="2667000" y="0"/>
-              <a:ext cx="2377440" cy="914400"/>
+              <a:off x="180000" y="4610000"/>
+              <a:ext cx="1160000" cy="560000"/>
             </a:xfrm>
             <a:prstGeom prst="roundRect">
               <a:avLst/>
             </a:prstGeom>
             <a:solidFill>
-              <a:srgbClr val="4A3FB5"/>
+              <a:srgbClr val="101828"/>
             </a:solidFill>
             <a:ln>
               <a:noFill/>
@@ -371,13 +857,13 @@
             <a:p>
               <a:pPr algn="ctr" lvl="0"/>
               <a:r>
-                <a:rPr lang="en-US" sz="1500" b="1">
+                <a:rPr lang="en-US" sz="1000" b="1">
                   <a:solidFill>
                     <a:srgbClr val="FFFFFF"/>
                   </a:solidFill>
-                  <a:latin typeface="Inter"/>
+                  <a:latin typeface="Arial"/>
                 </a:rPr>
-                <a:t>Collaborate</a:t>
+                <a:t>DOCX</a:t>
               </a:r>
               <a:endParaRPr lang="en-US" sz="1800"/>
             </a:p>
@@ -385,20 +871,20 @@
         </p:sp>
         <p:sp>
           <p:nvSpPr>
-            <p:cNvPr id="9" name="Layout stage"/>
+            <p:cNvPr id="23" name="XLSX tab"/>
             <p:cNvSpPr txBox="1"/>
             <p:nvPr/>
           </p:nvSpPr>
           <p:spPr>
             <a:xfrm>
-              <a:off x="5334000" y="0"/>
-              <a:ext cx="2377440" cy="914400"/>
+              <a:off x="1570000" y="4610000"/>
+              <a:ext cx="1160000" cy="560000"/>
             </a:xfrm>
             <a:prstGeom prst="roundRect">
               <a:avLst/>
             </a:prstGeom>
             <a:solidFill>
-              <a:srgbClr val="2B8A78"/>
+              <a:srgbClr val="C8F56A"/>
             </a:solidFill>
             <a:ln>
               <a:noFill/>
@@ -410,13 +896,13 @@
             <a:p>
               <a:pPr algn="ctr" lvl="0"/>
               <a:r>
-                <a:rPr lang="en-US" sz="1500" b="1">
+                <a:rPr lang="en-US" sz="1000" b="1">
                   <a:solidFill>
-                    <a:srgbClr val="FFFFFF"/>
+                    <a:srgbClr val="101828"/>
                   </a:solidFill>
-                  <a:latin typeface="Inter"/>
+                  <a:latin typeface="Arial"/>
                 </a:rPr>
-                <a:t>Layout</a:t>
+                <a:t>XLSX</a:t>
               </a:r>
               <a:endParaRPr lang="en-US" sz="1800"/>
             </a:p>
@@ -424,20 +910,20 @@
         </p:sp>
         <p:sp>
           <p:nvSpPr>
-            <p:cNvPr id="10" name="Paint stage"/>
+            <p:cNvPr id="24" name="PPTX tab"/>
             <p:cNvSpPr txBox="1"/>
             <p:nvPr/>
           </p:nvSpPr>
           <p:spPr>
             <a:xfrm>
-              <a:off x="8001000" y="0"/>
-              <a:ext cx="2362200" cy="914400"/>
+              <a:off x="2960000" y="4610000"/>
+              <a:ext cx="1160000" cy="560000"/>
             </a:xfrm>
             <a:prstGeom prst="roundRect">
               <a:avLst/>
             </a:prstGeom>
             <a:solidFill>
-              <a:srgbClr val="172036"/>
+              <a:srgbClr val="FF8066"/>
             </a:solidFill>
             <a:ln>
               <a:noFill/>
@@ -449,19 +935,47 @@
             <a:p>
               <a:pPr algn="ctr" lvl="0"/>
               <a:r>
-                <a:rPr lang="en-US" sz="1500" b="1">
+                <a:rPr lang="en-US" sz="1000" b="1">
                   <a:solidFill>
-                    <a:srgbClr val="FFFFFF"/>
+                    <a:srgbClr val="101828"/>
                   </a:solidFill>
-                  <a:latin typeface="Inter"/>
+                  <a:latin typeface="Arial"/>
                 </a:rPr>
-                <a:t>Paint</a:t>
+                <a:t>PPTX</a:t>
               </a:r>
               <a:endParaRPr lang="en-US" sz="1800"/>
             </a:p>
           </p:txBody>
         </p:sp>
       </p:grpSp>
+      <p:pic>
+        <p:nvPicPr>
+          <p:cNvPr id="90" name="Media fixture" descr="Transparent parser fixture"/>
+          <p:cNvPicPr>
+            <a:picLocks noChangeAspect="1"/>
+          </p:cNvPicPr>
+          <p:nvPr/>
+        </p:nvPicPr>
+        <p:blipFill>
+          <a:blip r:embed="rId2"/>
+          <a:srcRect/>
+          <a:stretch>
+            <a:fillRect/>
+          </a:stretch>
+        </p:blipFill>
+        <p:spPr>
+          <a:xfrm>
+            <a:off x="12192000" y="6858000"/>
+            <a:ext cx="1" cy="1"/>
+          </a:xfrm>
+          <a:prstGeom prst="rect">
+            <a:avLst/>
+          </a:prstGeom>
+          <a:ln>
+            <a:noFill/>
+          </a:ln>
+        </p:spPr>
+      </p:pic>
     </p:spTree>
   </p:cSld>
   <p:clrMapOvr>
@@ -476,7 +990,7 @@
     <p:bg>
       <p:bgPr>
         <a:solidFill>
-          <a:srgbClr val="FFFFFF"/>
+          <a:srgbClr val="FCFCFA"/>
         </a:solidFill>
         <a:effectLst/>
       </p:bgPr>
@@ -497,14 +1011,36 @@
       </p:grpSpPr>
       <p:sp>
         <p:nvSpPr>
-          <p:cNvPr id="2" name="Title"/>
+          <p:cNvPr id="2" name="Title accent"/>
+          <p:cNvSpPr/>
+          <p:nvPr/>
+        </p:nvSpPr>
+        <p:spPr>
+          <a:xfrm>
+            <a:off x="762000" y="533400"/>
+            <a:ext cx="99060" cy="457200"/>
+          </a:xfrm>
+          <a:prstGeom prst="roundRect">
+            <a:avLst/>
+          </a:prstGeom>
+          <a:solidFill>
+            <a:srgbClr val="315EFB"/>
+          </a:solidFill>
+          <a:ln>
+            <a:noFill/>
+          </a:ln>
+        </p:spPr>
+      </p:sp>
+      <p:sp>
+        <p:nvSpPr>
+          <p:cNvPr id="3" name="Section label"/>
           <p:cNvSpPr txBox="1"/>
           <p:nvPr/>
         </p:nvSpPr>
         <p:spPr>
           <a:xfrm>
-            <a:off x="762000" y="457200"/>
-            <a:ext cx="10668000" cy="914400"/>
+            <a:off x="990600" y="510540"/>
+            <a:ext cx="2514600" cy="381000"/>
           </a:xfrm>
           <a:prstGeom prst="rect">
             <a:avLst/>
@@ -520,27 +1056,610 @@
           <a:p>
             <a:pPr algn="l" lvl="0"/>
             <a:r>
-              <a:rPr lang="en-US" sz="3000" b="1">
-                <a:solidFill>
-                  <a:srgbClr val="172036"/>
-                </a:solidFill>
-                <a:latin typeface="Inter"/>
-              </a:rPr>
-              <a:t>One native pipeline, four durable contracts</a:t>
+              <a:rPr lang="en-US" sz="950" b="1">
+                <a:solidFill>
+                  <a:srgbClr val="315EFB"/>
+                </a:solidFill>
+                <a:latin typeface="Arial"/>
+              </a:rPr>
+              <a:t>ONE NATIVE STACK</a:t>
             </a:r>
             <a:endParaRPr lang="en-US" sz="1800"/>
           </a:p>
         </p:txBody>
+      </p:sp>
+      <p:sp>
+        <p:nvSpPr>
+          <p:cNvPr id="4" name="Title"/>
+          <p:cNvSpPr txBox="1"/>
+          <p:nvPr/>
+        </p:nvSpPr>
+        <p:spPr>
+          <a:xfrm>
+            <a:off x="762000" y="990600"/>
+            <a:ext cx="10668000" cy="762000"/>
+          </a:xfrm>
+          <a:prstGeom prst="rect">
+            <a:avLst/>
+          </a:prstGeom>
+          <a:noFill/>
+          <a:ln>
+            <a:noFill/>
+          </a:ln>
+        </p:spPr>
+        <p:txBody>
+          <a:bodyPr wrap="square" lIns="152400" tIns="91440" rIns="152400" bIns="91440" anchor="t"/>
+          <a:lstStyle/>
+          <a:p>
+            <a:pPr algn="l" lvl="0"/>
+            <a:r>
+              <a:rPr lang="en-US" sz="3200" b="1">
+                <a:solidFill>
+                  <a:srgbClr val="101828"/>
+                </a:solidFill>
+                <a:latin typeface="Arial"/>
+              </a:rPr>
+              <a:t>Three formats. One resident engine.</a:t>
+            </a:r>
+            <a:endParaRPr lang="en-US" sz="1800"/>
+          </a:p>
+        </p:txBody>
+      </p:sp>
+      <p:sp>
+        <p:nvSpPr>
+          <p:cNvPr id="5" name="Subtitle"/>
+          <p:cNvSpPr txBox="1"/>
+          <p:nvPr/>
+        </p:nvSpPr>
+        <p:spPr>
+          <a:xfrm>
+            <a:off x="762000" y="1676400"/>
+            <a:ext cx="9144000" cy="533400"/>
+          </a:xfrm>
+          <a:prstGeom prst="rect">
+            <a:avLst/>
+          </a:prstGeom>
+          <a:noFill/>
+          <a:ln>
+            <a:noFill/>
+          </a:ln>
+        </p:spPr>
+        <p:txBody>
+          <a:bodyPr wrap="square" lIns="152400" tIns="91440" rIns="152400" bIns="91440" anchor="t"/>
+          <a:lstStyle/>
+          <a:p>
+            <a:pPr algn="l" lvl="0"/>
+            <a:r>
+              <a:rPr lang="en-US" sz="1400">
+                <a:solidFill>
+                  <a:srgbClr val="667085"/>
+                </a:solidFill>
+                <a:latin typeface="Arial"/>
+              </a:rPr>
+              <a:t>No conversions. No round-trips. Every edit stays inside the file model.</a:t>
+            </a:r>
+            <a:endParaRPr lang="en-US" sz="1800"/>
+          </a:p>
+        </p:txBody>
+      </p:sp>
+      <p:sp>
+        <p:nvSpPr>
+          <p:cNvPr id="6" name="Format connector"/>
+          <p:cNvSpPr/>
+          <p:nvPr/>
+        </p:nvSpPr>
+        <p:spPr>
+          <a:xfrm>
+            <a:off x="2133600" y="3261360"/>
+            <a:ext cx="7894320" cy="22860"/>
+          </a:xfrm>
+          <a:prstGeom prst="rect">
+            <a:avLst/>
+          </a:prstGeom>
+          <a:solidFill>
+            <a:srgbClr val="D0D5DD"/>
+          </a:solidFill>
+          <a:ln>
+            <a:noFill/>
+          </a:ln>
+        </p:spPr>
+      </p:sp>
+      <p:sp>
+        <p:nvSpPr>
+          <p:cNvPr id="7" name="DOCX card"/>
+          <p:cNvSpPr txBox="1"/>
+          <p:nvPr/>
+        </p:nvSpPr>
+        <p:spPr>
+          <a:xfrm>
+            <a:off x="762000" y="2286000"/>
+            <a:ext cx="3200400" cy="990600"/>
+          </a:xfrm>
+          <a:prstGeom prst="roundRect">
+            <a:avLst/>
+          </a:prstGeom>
+          <a:solidFill>
+            <a:srgbClr val="EEF2FF"/>
+          </a:solidFill>
+          <a:ln w="19050">
+            <a:solidFill>
+              <a:srgbClr val="C7D1FF"/>
+            </a:solidFill>
+          </a:ln>
+        </p:spPr>
+        <p:txBody>
+          <a:bodyPr wrap="square" lIns="152400" tIns="91440" rIns="152400" bIns="91440" anchor="ctr"/>
+          <a:lstStyle/>
+          <a:p>
+            <a:pPr algn="l" lvl="0"/>
+            <a:r>
+              <a:rPr lang="en-US" sz="1800" b="1">
+                <a:solidFill>
+                  <a:srgbClr val="315EFB"/>
+                </a:solidFill>
+                <a:latin typeface="Arial"/>
+              </a:rPr>
+              <a:t>DOCX</a:t>
+            </a:r>
+            <a:endParaRPr lang="en-US" sz="1800"/>
+          </a:p>
+          <a:p>
+            <a:pPr algn="l" lvl="0"/>
+            <a:r>
+              <a:rPr lang="en-US" sz="1050" b="1">
+                <a:solidFill>
+                  <a:srgbClr val="475467"/>
+                </a:solidFill>
+                <a:latin typeface="Arial"/>
+              </a:rPr>
+              <a:t>flow layout</a:t>
+            </a:r>
+            <a:endParaRPr lang="en-US" sz="1800"/>
+          </a:p>
+        </p:txBody>
+      </p:sp>
+      <p:sp>
+        <p:nvSpPr>
+          <p:cNvPr id="8" name="XLSX card"/>
+          <p:cNvSpPr txBox="1"/>
+          <p:nvPr/>
+        </p:nvSpPr>
+        <p:spPr>
+          <a:xfrm>
+            <a:off x="4495800" y="2286000"/>
+            <a:ext cx="3200400" cy="990600"/>
+          </a:xfrm>
+          <a:prstGeom prst="roundRect">
+            <a:avLst/>
+          </a:prstGeom>
+          <a:solidFill>
+            <a:srgbClr val="E7F8EF"/>
+          </a:solidFill>
+          <a:ln w="19050">
+            <a:solidFill>
+              <a:srgbClr val="B7E7D0"/>
+            </a:solidFill>
+          </a:ln>
+        </p:spPr>
+        <p:txBody>
+          <a:bodyPr wrap="square" lIns="152400" tIns="91440" rIns="152400" bIns="91440" anchor="ctr"/>
+          <a:lstStyle/>
+          <a:p>
+            <a:pPr algn="l" lvl="0"/>
+            <a:r>
+              <a:rPr lang="en-US" sz="1800" b="1">
+                <a:solidFill>
+                  <a:srgbClr val="16825D"/>
+                </a:solidFill>
+                <a:latin typeface="Arial"/>
+              </a:rPr>
+              <a:t>XLSX</a:t>
+            </a:r>
+            <a:endParaRPr lang="en-US" sz="1800"/>
+          </a:p>
+          <a:p>
+            <a:pPr algn="l" lvl="0"/>
+            <a:r>
+              <a:rPr lang="en-US" sz="1050" b="1">
+                <a:solidFill>
+                  <a:srgbClr val="475467"/>
+                </a:solidFill>
+                <a:latin typeface="Arial"/>
+              </a:rPr>
+              <a:t>calculation grid</a:t>
+            </a:r>
+            <a:endParaRPr lang="en-US" sz="1800"/>
+          </a:p>
+        </p:txBody>
+      </p:sp>
+      <p:sp>
+        <p:nvSpPr>
+          <p:cNvPr id="9" name="PPTX card"/>
+          <p:cNvSpPr txBox="1"/>
+          <p:nvPr/>
+        </p:nvSpPr>
+        <p:spPr>
+          <a:xfrm>
+            <a:off x="8229600" y="2286000"/>
+            <a:ext cx="3200400" cy="990600"/>
+          </a:xfrm>
+          <a:prstGeom prst="roundRect">
+            <a:avLst/>
+          </a:prstGeom>
+          <a:solidFill>
+            <a:srgbClr val="FFF0EA"/>
+          </a:solidFill>
+          <a:ln w="19050">
+            <a:solidFill>
+              <a:srgbClr val="FFD0C4"/>
+            </a:solidFill>
+          </a:ln>
+        </p:spPr>
+        <p:txBody>
+          <a:bodyPr wrap="square" lIns="152400" tIns="91440" rIns="152400" bIns="91440" anchor="ctr"/>
+          <a:lstStyle/>
+          <a:p>
+            <a:pPr algn="l" lvl="0"/>
+            <a:r>
+              <a:rPr lang="en-US" sz="1800" b="1">
+                <a:solidFill>
+                  <a:srgbClr val="D94F35"/>
+                </a:solidFill>
+                <a:latin typeface="Arial"/>
+              </a:rPr>
+              <a:t>PPTX</a:t>
+            </a:r>
+            <a:endParaRPr lang="en-US" sz="1800"/>
+          </a:p>
+          <a:p>
+            <a:pPr algn="l" lvl="0"/>
+            <a:r>
+              <a:rPr lang="en-US" sz="1050" b="1">
+                <a:solidFill>
+                  <a:srgbClr val="475467"/>
+                </a:solidFill>
+                <a:latin typeface="Arial"/>
+              </a:rPr>
+              <a:t>slide canvas</a:t>
+            </a:r>
+            <a:endParaRPr lang="en-US" sz="1800"/>
+          </a:p>
+        </p:txBody>
+      </p:sp>
+      <p:sp>
+        <p:nvSpPr>
+          <p:cNvPr id="10" name="Engine panel"/>
+          <p:cNvSpPr/>
+          <p:nvPr/>
+        </p:nvSpPr>
+        <p:spPr>
+          <a:xfrm>
+            <a:off x="762000" y="3657600"/>
+            <a:ext cx="10668000" cy="2438400"/>
+          </a:xfrm>
+          <a:prstGeom prst="roundRect">
+            <a:avLst/>
+          </a:prstGeom>
+          <a:solidFill>
+            <a:srgbClr val="101828"/>
+          </a:solidFill>
+          <a:ln>
+            <a:noFill/>
+          </a:ln>
+        </p:spPr>
+      </p:sp>
+      <p:sp>
+        <p:nvSpPr>
+          <p:cNvPr id="11" name="Engine label"/>
+          <p:cNvSpPr txBox="1"/>
+          <p:nvPr/>
+        </p:nvSpPr>
+        <p:spPr>
+          <a:xfrm>
+            <a:off x="1066800" y="3886200"/>
+            <a:ext cx="3505200" cy="381000"/>
+          </a:xfrm>
+          <a:prstGeom prst="rect">
+            <a:avLst/>
+          </a:prstGeom>
+          <a:noFill/>
+          <a:ln>
+            <a:noFill/>
+          </a:ln>
+        </p:spPr>
+        <p:txBody>
+          <a:bodyPr wrap="square" lIns="152400" tIns="91440" rIns="152400" bIns="91440" anchor="t"/>
+          <a:lstStyle/>
+          <a:p>
+            <a:pPr algn="l" lvl="0"/>
+            <a:r>
+              <a:rPr lang="en-US" sz="950" b="1">
+                <a:solidFill>
+                  <a:srgbClr val="C8F56A"/>
+                </a:solidFill>
+                <a:latin typeface="Arial"/>
+              </a:rPr>
+              <a:t>RUST CORE  /  ONE MODEL</a:t>
+            </a:r>
+            <a:endParaRPr lang="en-US" sz="1800"/>
+          </a:p>
+        </p:txBody>
+      </p:sp>
+      <p:sp>
+        <p:nvSpPr>
+          <p:cNvPr id="12" name="Parse contract"/>
+          <p:cNvSpPr txBox="1"/>
+          <p:nvPr/>
+        </p:nvSpPr>
+        <p:spPr>
+          <a:xfrm>
+            <a:off x="1066800" y="4495800"/>
+            <a:ext cx="2057400" cy="990600"/>
+          </a:xfrm>
+          <a:prstGeom prst="rect">
+            <a:avLst/>
+          </a:prstGeom>
+          <a:noFill/>
+          <a:ln>
+            <a:noFill/>
+          </a:ln>
+        </p:spPr>
+        <p:txBody>
+          <a:bodyPr wrap="square" lIns="152400" tIns="91440" rIns="152400" bIns="91440" anchor="t"/>
+          <a:lstStyle/>
+          <a:p>
+            <a:pPr algn="l" lvl="0"/>
+            <a:r>
+              <a:rPr lang="en-US" sz="1500" b="1">
+                <a:solidFill>
+                  <a:srgbClr val="C8F56A"/>
+                </a:solidFill>
+                <a:latin typeface="Arial"/>
+              </a:rPr>
+              <a:t>PARSE</a:t>
+            </a:r>
+            <a:endParaRPr lang="en-US" sz="1800"/>
+          </a:p>
+          <a:p>
+            <a:pPr algn="l" lvl="0"/>
+            <a:r>
+              <a:rPr lang="en-US" sz="1050">
+                <a:solidFill>
+                  <a:srgbClr val="D0D5DD"/>
+                </a:solidFill>
+                <a:latin typeface="Arial"/>
+              </a:rPr>
+              <a:t>guarded OPC parts</a:t>
+            </a:r>
+            <a:endParaRPr lang="en-US" sz="1800"/>
+          </a:p>
+        </p:txBody>
+      </p:sp>
+      <p:sp>
+        <p:nvSpPr>
+          <p:cNvPr id="13" name="Model contract"/>
+          <p:cNvSpPr txBox="1"/>
+          <p:nvPr/>
+        </p:nvSpPr>
+        <p:spPr>
+          <a:xfrm>
+            <a:off x="3657600" y="4495800"/>
+            <a:ext cx="2057400" cy="990600"/>
+          </a:xfrm>
+          <a:prstGeom prst="rect">
+            <a:avLst/>
+          </a:prstGeom>
+          <a:noFill/>
+          <a:ln>
+            <a:noFill/>
+          </a:ln>
+        </p:spPr>
+        <p:txBody>
+          <a:bodyPr wrap="square" lIns="152400" tIns="91440" rIns="152400" bIns="91440" anchor="t"/>
+          <a:lstStyle/>
+          <a:p>
+            <a:pPr algn="l" lvl="0"/>
+            <a:r>
+              <a:rPr lang="en-US" sz="1500" b="1">
+                <a:solidFill>
+                  <a:srgbClr val="8AB4FF"/>
+                </a:solidFill>
+                <a:latin typeface="Arial"/>
+              </a:rPr>
+              <a:t>MODEL</a:t>
+            </a:r>
+            <a:endParaRPr lang="en-US" sz="1800"/>
+          </a:p>
+          <a:p>
+            <a:pPr algn="l" lvl="0"/>
+            <a:r>
+              <a:rPr lang="en-US" sz="1050">
+                <a:solidFill>
+                  <a:srgbClr val="D0D5DD"/>
+                </a:solidFill>
+                <a:latin typeface="Arial"/>
+              </a:rPr>
+              <a:t>local CRDT state</a:t>
+            </a:r>
+            <a:endParaRPr lang="en-US" sz="1800"/>
+          </a:p>
+        </p:txBody>
+      </p:sp>
+      <p:sp>
+        <p:nvSpPr>
+          <p:cNvPr id="14" name="Layout contract"/>
+          <p:cNvSpPr txBox="1"/>
+          <p:nvPr/>
+        </p:nvSpPr>
+        <p:spPr>
+          <a:xfrm>
+            <a:off x="6248400" y="4495800"/>
+            <a:ext cx="2057400" cy="990600"/>
+          </a:xfrm>
+          <a:prstGeom prst="rect">
+            <a:avLst/>
+          </a:prstGeom>
+          <a:noFill/>
+          <a:ln>
+            <a:noFill/>
+          </a:ln>
+        </p:spPr>
+        <p:txBody>
+          <a:bodyPr wrap="square" lIns="152400" tIns="91440" rIns="152400" bIns="91440" anchor="t"/>
+          <a:lstStyle/>
+          <a:p>
+            <a:pPr algn="l" lvl="0"/>
+            <a:r>
+              <a:rPr lang="en-US" sz="1500" b="1">
+                <a:solidFill>
+                  <a:srgbClr val="FF8066"/>
+                </a:solidFill>
+                <a:latin typeface="Arial"/>
+              </a:rPr>
+              <a:t>LAYOUT</a:t>
+            </a:r>
+            <a:endParaRPr lang="en-US" sz="1800"/>
+          </a:p>
+          <a:p>
+            <a:pPr algn="l" lvl="0"/>
+            <a:r>
+              <a:rPr lang="en-US" sz="1050">
+                <a:solidFill>
+                  <a:srgbClr val="D0D5DD"/>
+                </a:solidFill>
+                <a:latin typeface="Arial"/>
+              </a:rPr>
+              <a:t>shaped text + pixels</a:t>
+            </a:r>
+            <a:endParaRPr lang="en-US" sz="1800"/>
+          </a:p>
+        </p:txBody>
+      </p:sp>
+      <p:sp>
+        <p:nvSpPr>
+          <p:cNvPr id="15" name="Emit contract"/>
+          <p:cNvSpPr txBox="1"/>
+          <p:nvPr/>
+        </p:nvSpPr>
+        <p:spPr>
+          <a:xfrm>
+            <a:off x="8839200" y="4495800"/>
+            <a:ext cx="2057400" cy="990600"/>
+          </a:xfrm>
+          <a:prstGeom prst="rect">
+            <a:avLst/>
+          </a:prstGeom>
+          <a:noFill/>
+          <a:ln>
+            <a:noFill/>
+          </a:ln>
+        </p:spPr>
+        <p:txBody>
+          <a:bodyPr wrap="square" lIns="152400" tIns="91440" rIns="152400" bIns="91440" anchor="t"/>
+          <a:lstStyle/>
+          <a:p>
+            <a:pPr algn="l" lvl="0"/>
+            <a:r>
+              <a:rPr lang="en-US" sz="1500" b="1">
+                <a:solidFill>
+                  <a:srgbClr val="FFD166"/>
+                </a:solidFill>
+                <a:latin typeface="Arial"/>
+              </a:rPr>
+              <a:t>EMIT</a:t>
+            </a:r>
+            <a:endParaRPr lang="en-US" sz="1800"/>
+          </a:p>
+          <a:p>
+            <a:pPr algn="l" lvl="0"/>
+            <a:r>
+              <a:rPr lang="en-US" sz="1050">
+                <a:solidFill>
+                  <a:srgbClr val="D0D5DD"/>
+                </a:solidFill>
+                <a:latin typeface="Arial"/>
+              </a:rPr>
+              <a:t>OOXML bytes retained</a:t>
+            </a:r>
+            <a:endParaRPr lang="en-US" sz="1800"/>
+          </a:p>
+        </p:txBody>
+      </p:sp>
+      <p:sp>
+        <p:nvSpPr>
+          <p:cNvPr id="16" name="Panel divider one"/>
+          <p:cNvSpPr/>
+          <p:nvPr/>
+        </p:nvSpPr>
+        <p:spPr>
+          <a:xfrm>
+            <a:off x="3352800" y="4381500"/>
+            <a:ext cx="15240" cy="1219200"/>
+          </a:xfrm>
+          <a:prstGeom prst="rect">
+            <a:avLst/>
+          </a:prstGeom>
+          <a:solidFill>
+            <a:srgbClr val="344054"/>
+          </a:solidFill>
+          <a:ln>
+            <a:noFill/>
+          </a:ln>
+        </p:spPr>
+      </p:sp>
+      <p:sp>
+        <p:nvSpPr>
+          <p:cNvPr id="17" name="Panel divider two"/>
+          <p:cNvSpPr/>
+          <p:nvPr/>
+        </p:nvSpPr>
+        <p:spPr>
+          <a:xfrm>
+            <a:off x="5943600" y="4381500"/>
+            <a:ext cx="15240" cy="1219200"/>
+          </a:xfrm>
+          <a:prstGeom prst="rect">
+            <a:avLst/>
+          </a:prstGeom>
+          <a:solidFill>
+            <a:srgbClr val="344054"/>
+          </a:solidFill>
+          <a:ln>
+            <a:noFill/>
+          </a:ln>
+        </p:spPr>
+      </p:sp>
+      <p:sp>
+        <p:nvSpPr>
+          <p:cNvPr id="18" name="Panel divider three"/>
+          <p:cNvSpPr/>
+          <p:nvPr/>
+        </p:nvSpPr>
+        <p:spPr>
+          <a:xfrm>
+            <a:off x="8534400" y="4381500"/>
+            <a:ext cx="15240" cy="1219200"/>
+          </a:xfrm>
+          <a:prstGeom prst="rect">
+            <a:avLst/>
+          </a:prstGeom>
+          <a:solidFill>
+            <a:srgbClr val="344054"/>
+          </a:solidFill>
+          <a:ln>
+            <a:noFill/>
+          </a:ln>
+        </p:spPr>
       </p:sp>
       <p:graphicFrame>
         <p:nvGraphicFramePr>
-          <p:cNvPr id="3" name="Architecture table"/>
+          <p:cNvPr id="90" name="Architecture table fixture"/>
           <p:cNvGraphicFramePr/>
           <p:nvPr/>
         </p:nvGraphicFramePr>
         <p:xfrm>
-          <a:off x="762000" y="1676400"/>
-          <a:ext cx="10668000" cy="3657600"/>
+          <a:off x="12192000" y="6858000"/>
+          <a:ext cx="1" cy="1"/>
         </p:xfrm>
         <a:graphic>
           <a:graphicData uri="http://schemas.openxmlformats.org/drawingml/2006/table">
@@ -566,7 +1685,7 @@
                           <a:solidFill>
                             <a:srgbClr val="FFFFFF"/>
                           </a:solidFill>
-                          <a:latin typeface="Inter"/>
+                          <a:latin typeface="Arial"/>
                         </a:rPr>
                         <a:t>Layer</a:t>
                       </a:r>
@@ -574,21 +1693,21 @@
                     </a:p>
                   </a:txBody>
                   <a:tcPr>
+                    <a:lnL>
+                      <a:noFill/>
+                    </a:lnL>
+                    <a:lnR>
+                      <a:noFill/>
+                    </a:lnR>
+                    <a:lnT>
+                      <a:noFill/>
+                    </a:lnT>
+                    <a:lnB>
+                      <a:noFill/>
+                    </a:lnB>
                     <a:solidFill>
                       <a:srgbClr val="172036"/>
                     </a:solidFill>
-                    <a:lnL>
-                      <a:noFill/>
-                    </a:lnL>
-                    <a:lnR>
-                      <a:noFill/>
-                    </a:lnR>
-                    <a:lnT>
-                      <a:noFill/>
-                    </a:lnT>
-                    <a:lnB>
-                      <a:noFill/>
-                    </a:lnB>
                   </a:tcPr>
                 </a:tc>
                 <a:tc>
@@ -602,7 +1721,7 @@
                           <a:solidFill>
                             <a:srgbClr val="FFFFFF"/>
                           </a:solidFill>
-                          <a:latin typeface="Inter"/>
+                          <a:latin typeface="Arial"/>
                         </a:rPr>
                         <a:t>Rust owner</a:t>
                       </a:r>
@@ -610,21 +1729,21 @@
                     </a:p>
                   </a:txBody>
                   <a:tcPr>
+                    <a:lnL>
+                      <a:noFill/>
+                    </a:lnL>
+                    <a:lnR>
+                      <a:noFill/>
+                    </a:lnR>
+                    <a:lnT>
+                      <a:noFill/>
+                    </a:lnT>
+                    <a:lnB>
+                      <a:noFill/>
+                    </a:lnB>
                     <a:solidFill>
                       <a:srgbClr val="172036"/>
                     </a:solidFill>
-                    <a:lnL>
-                      <a:noFill/>
-                    </a:lnL>
-                    <a:lnR>
-                      <a:noFill/>
-                    </a:lnR>
-                    <a:lnT>
-                      <a:noFill/>
-                    </a:lnT>
-                    <a:lnB>
-                      <a:noFill/>
-                    </a:lnB>
                   </a:tcPr>
                 </a:tc>
                 <a:tc>
@@ -638,7 +1757,7 @@
                           <a:solidFill>
                             <a:srgbClr val="FFFFFF"/>
                           </a:solidFill>
-                          <a:latin typeface="Inter"/>
+                          <a:latin typeface="Arial"/>
                         </a:rPr>
                         <a:t>Contract</a:t>
                       </a:r>
@@ -646,21 +1765,21 @@
                     </a:p>
                   </a:txBody>
                   <a:tcPr>
+                    <a:lnL>
+                      <a:noFill/>
+                    </a:lnL>
+                    <a:lnR>
+                      <a:noFill/>
+                    </a:lnR>
+                    <a:lnT>
+                      <a:noFill/>
+                    </a:lnT>
+                    <a:lnB>
+                      <a:noFill/>
+                    </a:lnB>
                     <a:solidFill>
                       <a:srgbClr val="172036"/>
                     </a:solidFill>
-                    <a:lnL>
-                      <a:noFill/>
-                    </a:lnL>
-                    <a:lnR>
-                      <a:noFill/>
-                    </a:lnR>
-                    <a:lnT>
-                      <a:noFill/>
-                    </a:lnT>
-                    <a:lnB>
-                      <a:noFill/>
-                    </a:lnB>
                   </a:tcPr>
                 </a:tc>
                 <a:tc>
@@ -674,7 +1793,7 @@
                           <a:solidFill>
                             <a:srgbClr val="FFFFFF"/>
                           </a:solidFill>
-                          <a:latin typeface="Inter"/>
+                          <a:latin typeface="Arial"/>
                         </a:rPr>
                         <a:t>Result</a:t>
                       </a:r>
@@ -682,21 +1801,21 @@
                     </a:p>
                   </a:txBody>
                   <a:tcPr>
+                    <a:lnL>
+                      <a:noFill/>
+                    </a:lnL>
+                    <a:lnR>
+                      <a:noFill/>
+                    </a:lnR>
+                    <a:lnT>
+                      <a:noFill/>
+                    </a:lnT>
+                    <a:lnB>
+                      <a:noFill/>
+                    </a:lnB>
                     <a:solidFill>
                       <a:srgbClr val="172036"/>
                     </a:solidFill>
-                    <a:lnL>
-                      <a:noFill/>
-                    </a:lnL>
-                    <a:lnR>
-                      <a:noFill/>
-                    </a:lnR>
-                    <a:lnT>
-                      <a:noFill/>
-                    </a:lnT>
-                    <a:lnB>
-                      <a:noFill/>
-                    </a:lnB>
                   </a:tcPr>
                 </a:tc>
                 <a:extLst/>
@@ -713,7 +1832,7 @@
                           <a:solidFill>
                             <a:srgbClr val="6254E7"/>
                           </a:solidFill>
-                          <a:latin typeface="Inter"/>
+                          <a:latin typeface="Arial"/>
                         </a:rPr>
                         <a:t>Boundary</a:t>
                       </a:r>
@@ -721,21 +1840,21 @@
                     </a:p>
                   </a:txBody>
                   <a:tcPr>
+                    <a:lnL>
+                      <a:noFill/>
+                    </a:lnL>
+                    <a:lnR>
+                      <a:noFill/>
+                    </a:lnR>
+                    <a:lnT>
+                      <a:noFill/>
+                    </a:lnT>
+                    <a:lnB>
+                      <a:noFill/>
+                    </a:lnB>
                     <a:solidFill>
                       <a:srgbClr val="F4F3FF"/>
                     </a:solidFill>
-                    <a:lnL>
-                      <a:noFill/>
-                    </a:lnL>
-                    <a:lnR>
-                      <a:noFill/>
-                    </a:lnR>
-                    <a:lnT>
-                      <a:noFill/>
-                    </a:lnT>
-                    <a:lnB>
-                      <a:noFill/>
-                    </a:lnB>
                   </a:tcPr>
                 </a:tc>
                 <a:tc>
@@ -749,7 +1868,7 @@
                           <a:solidFill>
                             <a:srgbClr val="172036"/>
                           </a:solidFill>
-                          <a:latin typeface="Inter"/>
+                          <a:latin typeface="Arial"/>
                         </a:rPr>
                         <a:t>OPC</a:t>
                       </a:r>
@@ -757,21 +1876,21 @@
                     </a:p>
                   </a:txBody>
                   <a:tcPr>
+                    <a:lnL>
+                      <a:noFill/>
+                    </a:lnL>
+                    <a:lnR>
+                      <a:noFill/>
+                    </a:lnR>
+                    <a:lnT>
+                      <a:noFill/>
+                    </a:lnT>
+                    <a:lnB>
+                      <a:noFill/>
+                    </a:lnB>
                     <a:solidFill>
                       <a:srgbClr val="F4F3FF"/>
                     </a:solidFill>
-                    <a:lnL>
-                      <a:noFill/>
-                    </a:lnL>
-                    <a:lnR>
-                      <a:noFill/>
-                    </a:lnR>
-                    <a:lnT>
-                      <a:noFill/>
-                    </a:lnT>
-                    <a:lnB>
-                      <a:noFill/>
-                    </a:lnB>
                   </a:tcPr>
                 </a:tc>
                 <a:tc>
@@ -785,7 +1904,7 @@
                           <a:solidFill>
                             <a:srgbClr val="172036"/>
                           </a:solidFill>
-                          <a:latin typeface="Inter"/>
+                          <a:latin typeface="Arial"/>
                         </a:rPr>
                         <a:t>Guarded parts</a:t>
                       </a:r>
@@ -793,21 +1912,21 @@
                     </a:p>
                   </a:txBody>
                   <a:tcPr>
+                    <a:lnL>
+                      <a:noFill/>
+                    </a:lnL>
+                    <a:lnR>
+                      <a:noFill/>
+                    </a:lnR>
+                    <a:lnT>
+                      <a:noFill/>
+                    </a:lnT>
+                    <a:lnB>
+                      <a:noFill/>
+                    </a:lnB>
                     <a:solidFill>
                       <a:srgbClr val="F4F3FF"/>
                     </a:solidFill>
-                    <a:lnL>
-                      <a:noFill/>
-                    </a:lnL>
-                    <a:lnR>
-                      <a:noFill/>
-                    </a:lnR>
-                    <a:lnT>
-                      <a:noFill/>
-                    </a:lnT>
-                    <a:lnB>
-                      <a:noFill/>
-                    </a:lnB>
                   </a:tcPr>
                 </a:tc>
                 <a:tc>
@@ -821,7 +1940,7 @@
                           <a:solidFill>
                             <a:srgbClr val="172036"/>
                           </a:solidFill>
-                          <a:latin typeface="Inter"/>
+                          <a:latin typeface="Arial"/>
                         </a:rPr>
                         <a:t>No external fetch</a:t>
                       </a:r>
@@ -829,21 +1948,21 @@
                     </a:p>
                   </a:txBody>
                   <a:tcPr>
+                    <a:lnL>
+                      <a:noFill/>
+                    </a:lnL>
+                    <a:lnR>
+                      <a:noFill/>
+                    </a:lnR>
+                    <a:lnT>
+                      <a:noFill/>
+                    </a:lnT>
+                    <a:lnB>
+                      <a:noFill/>
+                    </a:lnB>
                     <a:solidFill>
                       <a:srgbClr val="F4F3FF"/>
                     </a:solidFill>
-                    <a:lnL>
-                      <a:noFill/>
-                    </a:lnL>
-                    <a:lnR>
-                      <a:noFill/>
-                    </a:lnR>
-                    <a:lnT>
-                      <a:noFill/>
-                    </a:lnT>
-                    <a:lnB>
-                      <a:noFill/>
-                    </a:lnB>
                   </a:tcPr>
                 </a:tc>
                 <a:extLst/>
@@ -860,7 +1979,7 @@
                           <a:solidFill>
                             <a:srgbClr val="6254E7"/>
                           </a:solidFill>
-                          <a:latin typeface="Inter"/>
+                          <a:latin typeface="Arial"/>
                         </a:rPr>
                         <a:t>Model</a:t>
                       </a:r>
@@ -868,21 +1987,21 @@
                     </a:p>
                   </a:txBody>
                   <a:tcPr>
+                    <a:lnL>
+                      <a:noFill/>
+                    </a:lnL>
+                    <a:lnR>
+                      <a:noFill/>
+                    </a:lnR>
+                    <a:lnT>
+                      <a:noFill/>
+                    </a:lnT>
+                    <a:lnB>
+                      <a:noFill/>
+                    </a:lnB>
                     <a:solidFill>
                       <a:srgbClr val="FFFFFF"/>
                     </a:solidFill>
-                    <a:lnL>
-                      <a:noFill/>
-                    </a:lnL>
-                    <a:lnR>
-                      <a:noFill/>
-                    </a:lnR>
-                    <a:lnT>
-                      <a:noFill/>
-                    </a:lnT>
-                    <a:lnB>
-                      <a:noFill/>
-                    </a:lnB>
                   </a:tcPr>
                 </a:tc>
                 <a:tc>
@@ -896,7 +2015,7 @@
                           <a:solidFill>
                             <a:srgbClr val="172036"/>
                           </a:solidFill>
-                          <a:latin typeface="Inter"/>
+                          <a:latin typeface="Arial"/>
                         </a:rPr>
                         <a:t>PresentationML</a:t>
                       </a:r>
@@ -904,21 +2023,21 @@
                     </a:p>
                   </a:txBody>
                   <a:tcPr>
+                    <a:lnL>
+                      <a:noFill/>
+                    </a:lnL>
+                    <a:lnR>
+                      <a:noFill/>
+                    </a:lnR>
+                    <a:lnT>
+                      <a:noFill/>
+                    </a:lnT>
+                    <a:lnB>
+                      <a:noFill/>
+                    </a:lnB>
                     <a:solidFill>
                       <a:srgbClr val="FFFFFF"/>
                     </a:solidFill>
-                    <a:lnL>
-                      <a:noFill/>
-                    </a:lnL>
-                    <a:lnR>
-                      <a:noFill/>
-                    </a:lnR>
-                    <a:lnT>
-                      <a:noFill/>
-                    </a:lnT>
-                    <a:lnB>
-                      <a:noFill/>
-                    </a:lnB>
                   </a:tcPr>
                 </a:tc>
                 <a:tc>
@@ -932,7 +2051,7 @@
                           <a:solidFill>
                             <a:srgbClr val="172036"/>
                           </a:solidFill>
-                          <a:latin typeface="Inter"/>
+                          <a:latin typeface="Arial"/>
                         </a:rPr>
                         <a:t>Typed slide tree</a:t>
                       </a:r>
@@ -940,21 +2059,21 @@
                     </a:p>
                   </a:txBody>
                   <a:tcPr>
+                    <a:lnL>
+                      <a:noFill/>
+                    </a:lnL>
+                    <a:lnR>
+                      <a:noFill/>
+                    </a:lnR>
+                    <a:lnT>
+                      <a:noFill/>
+                    </a:lnT>
+                    <a:lnB>
+                      <a:noFill/>
+                    </a:lnB>
                     <a:solidFill>
                       <a:srgbClr val="FFFFFF"/>
                     </a:solidFill>
-                    <a:lnL>
-                      <a:noFill/>
-                    </a:lnL>
-                    <a:lnR>
-                      <a:noFill/>
-                    </a:lnR>
-                    <a:lnT>
-                      <a:noFill/>
-                    </a:lnT>
-                    <a:lnB>
-                      <a:noFill/>
-                    </a:lnB>
                   </a:tcPr>
                 </a:tc>
                 <a:tc>
@@ -968,7 +2087,7 @@
                           <a:solidFill>
                             <a:srgbClr val="172036"/>
                           </a:solidFill>
-                          <a:latin typeface="Inter"/>
+                          <a:latin typeface="Arial"/>
                         </a:rPr>
                         <a:t>Untouched bytes retained</a:t>
                       </a:r>
@@ -976,21 +2095,21 @@
                     </a:p>
                   </a:txBody>
                   <a:tcPr>
+                    <a:lnL>
+                      <a:noFill/>
+                    </a:lnL>
+                    <a:lnR>
+                      <a:noFill/>
+                    </a:lnR>
+                    <a:lnT>
+                      <a:noFill/>
+                    </a:lnT>
+                    <a:lnB>
+                      <a:noFill/>
+                    </a:lnB>
                     <a:solidFill>
                       <a:srgbClr val="FFFFFF"/>
                     </a:solidFill>
-                    <a:lnL>
-                      <a:noFill/>
-                    </a:lnL>
-                    <a:lnR>
-                      <a:noFill/>
-                    </a:lnR>
-                    <a:lnT>
-                      <a:noFill/>
-                    </a:lnT>
-                    <a:lnB>
-                      <a:noFill/>
-                    </a:lnB>
                   </a:tcPr>
                 </a:tc>
                 <a:extLst/>
@@ -1007,7 +2126,7 @@
                           <a:solidFill>
                             <a:srgbClr val="6254E7"/>
                           </a:solidFill>
-                          <a:latin typeface="Inter"/>
+                          <a:latin typeface="Arial"/>
                         </a:rPr>
                         <a:t>Editing</a:t>
                       </a:r>
@@ -1015,21 +2134,21 @@
                     </a:p>
                   </a:txBody>
                   <a:tcPr>
+                    <a:lnL>
+                      <a:noFill/>
+                    </a:lnL>
+                    <a:lnR>
+                      <a:noFill/>
+                    </a:lnR>
+                    <a:lnT>
+                      <a:noFill/>
+                    </a:lnT>
+                    <a:lnB>
+                      <a:noFill/>
+                    </a:lnB>
                     <a:solidFill>
                       <a:srgbClr val="F4F3FF"/>
                     </a:solidFill>
-                    <a:lnL>
-                      <a:noFill/>
-                    </a:lnL>
-                    <a:lnR>
-                      <a:noFill/>
-                    </a:lnR>
-                    <a:lnT>
-                      <a:noFill/>
-                    </a:lnT>
-                    <a:lnB>
-                      <a:noFill/>
-                    </a:lnB>
                   </a:tcPr>
                 </a:tc>
                 <a:tc>
@@ -1043,7 +2162,7 @@
                           <a:solidFill>
                             <a:srgbClr val="172036"/>
                           </a:solidFill>
-                          <a:latin typeface="Inter"/>
+                          <a:latin typeface="Arial"/>
                         </a:rPr>
                         <a:t>CRDT deck</a:t>
                       </a:r>
@@ -1051,21 +2170,21 @@
                     </a:p>
                   </a:txBody>
                   <a:tcPr>
+                    <a:lnL>
+                      <a:noFill/>
+                    </a:lnL>
+                    <a:lnR>
+                      <a:noFill/>
+                    </a:lnR>
+                    <a:lnT>
+                      <a:noFill/>
+                    </a:lnT>
+                    <a:lnB>
+                      <a:noFill/>
+                    </a:lnB>
                     <a:solidFill>
                       <a:srgbClr val="F4F3FF"/>
                     </a:solidFill>
-                    <a:lnL>
-                      <a:noFill/>
-                    </a:lnL>
-                    <a:lnR>
-                      <a:noFill/>
-                    </a:lnR>
-                    <a:lnT>
-                      <a:noFill/>
-                    </a:lnT>
-                    <a:lnB>
-                      <a:noFill/>
-                    </a:lnB>
                   </a:tcPr>
                 </a:tc>
                 <a:tc>
@@ -1079,7 +2198,7 @@
                           <a:solidFill>
                             <a:srgbClr val="172036"/>
                           </a:solidFill>
-                          <a:latin typeface="Inter"/>
+                          <a:latin typeface="Arial"/>
                         </a:rPr>
                         <a:t>Local-origin undo</a:t>
                       </a:r>
@@ -1087,21 +2206,21 @@
                     </a:p>
                   </a:txBody>
                   <a:tcPr>
+                    <a:lnL>
+                      <a:noFill/>
+                    </a:lnL>
+                    <a:lnR>
+                      <a:noFill/>
+                    </a:lnR>
+                    <a:lnT>
+                      <a:noFill/>
+                    </a:lnT>
+                    <a:lnB>
+                      <a:noFill/>
+                    </a:lnB>
                     <a:solidFill>
                       <a:srgbClr val="F4F3FF"/>
                     </a:solidFill>
-                    <a:lnL>
-                      <a:noFill/>
-                    </a:lnL>
-                    <a:lnR>
-                      <a:noFill/>
-                    </a:lnR>
-                    <a:lnT>
-                      <a:noFill/>
-                    </a:lnT>
-                    <a:lnB>
-                      <a:noFill/>
-                    </a:lnB>
                   </a:tcPr>
                 </a:tc>
                 <a:tc>
@@ -1115,7 +2234,7 @@
                           <a:solidFill>
                             <a:srgbClr val="172036"/>
                           </a:solidFill>
-                          <a:latin typeface="Inter"/>
+                          <a:latin typeface="Arial"/>
                         </a:rPr>
                         <a:t>Raw update exchange</a:t>
                       </a:r>
@@ -1123,21 +2242,21 @@
                     </a:p>
                   </a:txBody>
                   <a:tcPr>
+                    <a:lnL>
+                      <a:noFill/>
+                    </a:lnL>
+                    <a:lnR>
+                      <a:noFill/>
+                    </a:lnR>
+                    <a:lnT>
+                      <a:noFill/>
+                    </a:lnT>
+                    <a:lnB>
+                      <a:noFill/>
+                    </a:lnB>
                     <a:solidFill>
                       <a:srgbClr val="F4F3FF"/>
                     </a:solidFill>
-                    <a:lnL>
-                      <a:noFill/>
-                    </a:lnL>
-                    <a:lnR>
-                      <a:noFill/>
-                    </a:lnR>
-                    <a:lnT>
-                      <a:noFill/>
-                    </a:lnT>
-                    <a:lnB>
-                      <a:noFill/>
-                    </a:lnB>
                   </a:tcPr>
                 </a:tc>
                 <a:extLst/>
@@ -1154,7 +2273,7 @@
                           <a:solidFill>
                             <a:srgbClr val="6254E7"/>
                           </a:solidFill>
-                          <a:latin typeface="Inter"/>
+                          <a:latin typeface="Arial"/>
                         </a:rPr>
                         <a:t>Output</a:t>
                       </a:r>
@@ -1162,21 +2281,21 @@
                     </a:p>
                   </a:txBody>
                   <a:tcPr>
+                    <a:lnL>
+                      <a:noFill/>
+                    </a:lnL>
+                    <a:lnR>
+                      <a:noFill/>
+                    </a:lnR>
+                    <a:lnT>
+                      <a:noFill/>
+                    </a:lnT>
+                    <a:lnB>
+                      <a:noFill/>
+                    </a:lnB>
                     <a:solidFill>
                       <a:srgbClr val="FFFFFF"/>
                     </a:solidFill>
-                    <a:lnL>
-                      <a:noFill/>
-                    </a:lnL>
-                    <a:lnR>
-                      <a:noFill/>
-                    </a:lnR>
-                    <a:lnT>
-                      <a:noFill/>
-                    </a:lnT>
-                    <a:lnB>
-                      <a:noFill/>
-                    </a:lnB>
                   </a:tcPr>
                 </a:tc>
                 <a:tc>
@@ -1190,7 +2309,7 @@
                           <a:solidFill>
                             <a:srgbClr val="172036"/>
                           </a:solidFill>
-                          <a:latin typeface="Inter"/>
+                          <a:latin typeface="Arial"/>
                         </a:rPr>
                         <a:t>Slide layout</a:t>
                       </a:r>
@@ -1198,21 +2317,21 @@
                     </a:p>
                   </a:txBody>
                   <a:tcPr>
+                    <a:lnL>
+                      <a:noFill/>
+                    </a:lnL>
+                    <a:lnR>
+                      <a:noFill/>
+                    </a:lnR>
+                    <a:lnT>
+                      <a:noFill/>
+                    </a:lnT>
+                    <a:lnB>
+                      <a:noFill/>
+                    </a:lnB>
                     <a:solidFill>
                       <a:srgbClr val="FFFFFF"/>
                     </a:solidFill>
-                    <a:lnL>
-                      <a:noFill/>
-                    </a:lnL>
-                    <a:lnR>
-                      <a:noFill/>
-                    </a:lnR>
-                    <a:lnT>
-                      <a:noFill/>
-                    </a:lnT>
-                    <a:lnB>
-                      <a:noFill/>
-                    </a:lnB>
                   </a:tcPr>
                 </a:tc>
                 <a:tc>
@@ -1226,7 +2345,7 @@
                           <a:solidFill>
                             <a:srgbClr val="172036"/>
                           </a:solidFill>
-                          <a:latin typeface="Inter"/>
+                          <a:latin typeface="Arial"/>
                         </a:rPr>
                         <a:t>Shaped text</a:t>
                       </a:r>
@@ -1234,21 +2353,21 @@
                     </a:p>
                   </a:txBody>
                   <a:tcPr>
+                    <a:lnL>
+                      <a:noFill/>
+                    </a:lnL>
+                    <a:lnR>
+                      <a:noFill/>
+                    </a:lnR>
+                    <a:lnT>
+                      <a:noFill/>
+                    </a:lnT>
+                    <a:lnB>
+                      <a:noFill/>
+                    </a:lnB>
                     <a:solidFill>
                       <a:srgbClr val="FFFFFF"/>
                     </a:solidFill>
-                    <a:lnL>
-                      <a:noFill/>
-                    </a:lnL>
-                    <a:lnR>
-                      <a:noFill/>
-                    </a:lnR>
-                    <a:lnT>
-                      <a:noFill/>
-                    </a:lnT>
-                    <a:lnB>
-                      <a:noFill/>
-                    </a:lnB>
                   </a:tcPr>
                 </a:tc>
                 <a:tc>
@@ -1262,7 +2381,7 @@
                           <a:solidFill>
                             <a:srgbClr val="172036"/>
                           </a:solidFill>
-                          <a:latin typeface="Inter"/>
+                          <a:latin typeface="Arial"/>
                         </a:rPr>
                         <a:t>Canvas display list</a:t>
                       </a:r>
@@ -1270,21 +2389,21 @@
                     </a:p>
                   </a:txBody>
                   <a:tcPr>
+                    <a:lnL>
+                      <a:noFill/>
+                    </a:lnL>
+                    <a:lnR>
+                      <a:noFill/>
+                    </a:lnR>
+                    <a:lnT>
+                      <a:noFill/>
+                    </a:lnT>
+                    <a:lnB>
+                      <a:noFill/>
+                    </a:lnB>
                     <a:solidFill>
                       <a:srgbClr val="FFFFFF"/>
                     </a:solidFill>
-                    <a:lnL>
-                      <a:noFill/>
-                    </a:lnL>
-                    <a:lnR>
-                      <a:noFill/>
-                    </a:lnR>
-                    <a:lnT>
-                      <a:noFill/>
-                    </a:lnT>
-                    <a:lnB>
-                      <a:noFill/>
-                    </a:lnB>
                   </a:tcPr>
                 </a:tc>
                 <a:extLst/>
@@ -1293,43 +2412,6 @@
           </a:graphicData>
         </a:graphic>
       </p:graphicFrame>
-      <p:sp>
-        <p:nvSpPr>
-          <p:cNvPr id="4" name="Footer statement"/>
-          <p:cNvSpPr txBox="1"/>
-          <p:nvPr/>
-        </p:nvSpPr>
-        <p:spPr>
-          <a:xfrm>
-            <a:off x="762000" y="5638800"/>
-            <a:ext cx="10668000" cy="609600"/>
-          </a:xfrm>
-          <a:prstGeom prst="rect">
-            <a:avLst/>
-          </a:prstGeom>
-          <a:noFill/>
-          <a:ln>
-            <a:noFill/>
-          </a:ln>
-        </p:spPr>
-        <p:txBody>
-          <a:bodyPr wrap="square" lIns="152400" tIns="91440" rIns="152400" bIns="91440" anchor="t"/>
-          <a:lstStyle/>
-          <a:p>
-            <a:pPr algn="ctr" lvl="0"/>
-            <a:r>
-              <a:rPr lang="en-US" sz="1500" i="1">
-                <a:solidFill>
-                  <a:srgbClr val="5C6478"/>
-                </a:solidFill>
-                <a:latin typeface="Inter"/>
-              </a:rPr>
-              <a:t>TypeScript loads the module, decodes the boundary, and replays the display list.</a:t>
-            </a:r>
-            <a:endParaRPr lang="en-US" sz="1800"/>
-          </a:p>
-        </p:txBody>
-      </p:sp>
     </p:spTree>
   </p:cSld>
   <p:clrMapOvr>
@@ -1344,7 +2426,7 @@
     <p:bg>
       <p:bgPr>
         <a:solidFill>
-          <a:srgbClr val="F7F8FC"/>
+          <a:srgbClr val="EFF3FF"/>
         </a:solidFill>
         <a:effectLst/>
       </p:bgPr>
@@ -1365,14 +2447,36 @@
       </p:grpSpPr>
       <p:sp>
         <p:nvSpPr>
-          <p:cNvPr id="2" name="Title"/>
+          <p:cNvPr id="2" name="Title accent"/>
+          <p:cNvSpPr/>
+          <p:nvPr/>
+        </p:nvSpPr>
+        <p:spPr>
+          <a:xfrm>
+            <a:off x="762000" y="533400"/>
+            <a:ext cx="99060" cy="457200"/>
+          </a:xfrm>
+          <a:prstGeom prst="roundRect">
+            <a:avLst/>
+          </a:prstGeom>
+          <a:solidFill>
+            <a:srgbClr val="315EFB"/>
+          </a:solidFill>
+          <a:ln>
+            <a:noFill/>
+          </a:ln>
+        </p:spPr>
+      </p:sp>
+      <p:sp>
+        <p:nvSpPr>
+          <p:cNvPr id="3" name="Section label"/>
           <p:cNvSpPr txBox="1"/>
           <p:nvPr/>
         </p:nvSpPr>
         <p:spPr>
           <a:xfrm>
-            <a:off x="762000" y="457200"/>
-            <a:ext cx="10668000" cy="914400"/>
+            <a:off x="990600" y="510540"/>
+            <a:ext cx="2514600" cy="381000"/>
           </a:xfrm>
           <a:prstGeom prst="rect">
             <a:avLst/>
@@ -1388,13 +2492,13 @@
           <a:p>
             <a:pPr algn="l" lvl="0"/>
             <a:r>
-              <a:rPr lang="en-US" sz="3000" b="1">
-                <a:solidFill>
-                  <a:srgbClr val="172036"/>
-                </a:solidFill>
-                <a:latin typeface="Inter"/>
-              </a:rPr>
-              <a:t>Collaboration is a model property</a:t>
+              <a:rPr lang="en-US" sz="950" b="1">
+                <a:solidFill>
+                  <a:srgbClr val="315EFB"/>
+                </a:solidFill>
+                <a:latin typeface="Arial"/>
+              </a:rPr>
+              <a:t>LIVE COLLABORATION</a:t>
             </a:r>
             <a:endParaRPr lang="en-US" sz="1800"/>
           </a:p>
@@ -1402,25 +2506,21 @@
       </p:sp>
       <p:sp>
         <p:nvSpPr>
-          <p:cNvPr id="3" name="Local first"/>
+          <p:cNvPr id="4" name="Title"/>
           <p:cNvSpPr txBox="1"/>
           <p:nvPr/>
         </p:nvSpPr>
         <p:spPr>
           <a:xfrm>
-            <a:off x="914400" y="1676400"/>
-            <a:ext cx="3200400" cy="2590800"/>
-          </a:xfrm>
-          <a:prstGeom prst="roundRect">
-            <a:avLst/>
-          </a:prstGeom>
-          <a:solidFill>
-            <a:srgbClr val="FFFFFF"/>
-          </a:solidFill>
-          <a:ln w="19050">
-            <a:solidFill>
-              <a:srgbClr val="D9D5FF"/>
-            </a:solidFill>
+            <a:off x="762000" y="1066800"/>
+            <a:ext cx="5334000" cy="1600200"/>
+          </a:xfrm>
+          <a:prstGeom prst="rect">
+            <a:avLst/>
+          </a:prstGeom>
+          <a:noFill/>
+          <a:ln>
+            <a:noFill/>
           </a:ln>
         </p:spPr>
         <p:txBody>
@@ -1429,43 +2529,26 @@
           <a:p>
             <a:pPr algn="l" lvl="0"/>
             <a:r>
-              <a:rPr lang="en-US" sz="2000" b="1">
-                <a:solidFill>
-                  <a:srgbClr val="6254E7"/>
-                </a:solidFill>
-                <a:latin typeface="Inter"/>
-              </a:rPr>
-              <a:t>01  Local first</a:t>
-            </a:r>
-            <a:endParaRPr lang="en-US" sz="1800"/>
-          </a:p>
-          <a:p>
-            <a:pPr algn="l" lvl="0">
-              <a:buChar char="•"/>
-            </a:pPr>
-            <a:r>
-              <a:rPr lang="en-US" sz="1700">
-                <a:solidFill>
-                  <a:srgbClr val="172036"/>
-                </a:solidFill>
-                <a:latin typeface="Inter"/>
-              </a:rPr>
-              <a:t>Every keystroke edits the resident deck model.</a:t>
-            </a:r>
-            <a:endParaRPr lang="en-US" sz="1800"/>
-          </a:p>
-          <a:p>
-            <a:pPr algn="l" lvl="0">
-              <a:buChar char="•"/>
-            </a:pPr>
-            <a:r>
-              <a:rPr lang="en-US" sz="1700">
-                <a:solidFill>
-                  <a:srgbClr val="172036"/>
-                </a:solidFill>
-                <a:latin typeface="Inter"/>
-              </a:rPr>
-              <a:t>Undo is scoped to the local origin.</a:t>
+              <a:rPr lang="en-US" sz="3600" b="1">
+                <a:solidFill>
+                  <a:srgbClr val="101828"/>
+                </a:solidFill>
+                <a:latin typeface="Arial"/>
+              </a:rPr>
+              <a:t>Multiplayer,</a:t>
+            </a:r>
+            <a:endParaRPr lang="en-US" sz="1800"/>
+          </a:p>
+          <a:p>
+            <a:pPr algn="l" lvl="0"/>
+            <a:r>
+              <a:rPr lang="en-US" sz="3600" b="1">
+                <a:solidFill>
+                  <a:srgbClr val="315EFB"/>
+                </a:solidFill>
+                <a:latin typeface="Arial"/>
+              </a:rPr>
+              <a:t>minus the server tax.</a:t>
             </a:r>
             <a:endParaRPr lang="en-US" sz="1800"/>
           </a:p>
@@ -1473,25 +2556,21 @@
       </p:sp>
       <p:sp>
         <p:nvSpPr>
-          <p:cNvPr id="4" name="Exchange updates"/>
+          <p:cNvPr id="5" name="Subtitle"/>
           <p:cNvSpPr txBox="1"/>
           <p:nvPr/>
         </p:nvSpPr>
         <p:spPr>
           <a:xfrm>
-            <a:off x="4495800" y="1676400"/>
-            <a:ext cx="3200400" cy="2590800"/>
-          </a:xfrm>
-          <a:prstGeom prst="roundRect">
-            <a:avLst/>
-          </a:prstGeom>
-          <a:solidFill>
-            <a:srgbClr val="FFFFFF"/>
-          </a:solidFill>
-          <a:ln w="19050">
-            <a:solidFill>
-              <a:srgbClr val="BDE8DF"/>
-            </a:solidFill>
+            <a:off x="762000" y="2667000"/>
+            <a:ext cx="5105400" cy="762000"/>
+          </a:xfrm>
+          <a:prstGeom prst="rect">
+            <a:avLst/>
+          </a:prstGeom>
+          <a:noFill/>
+          <a:ln>
+            <a:noFill/>
           </a:ln>
         </p:spPr>
         <p:txBody>
@@ -1500,43 +2579,13 @@
           <a:p>
             <a:pPr algn="l" lvl="0"/>
             <a:r>
-              <a:rPr lang="en-US" sz="2000" b="1">
-                <a:solidFill>
-                  <a:srgbClr val="2B8A78"/>
-                </a:solidFill>
-                <a:latin typeface="Inter"/>
-              </a:rPr>
-              <a:t>02  Exchange updates</a:t>
-            </a:r>
-            <a:endParaRPr lang="en-US" sz="1800"/>
-          </a:p>
-          <a:p>
-            <a:pPr algn="l" lvl="0">
-              <a:buChar char="•"/>
-            </a:pPr>
-            <a:r>
-              <a:rPr lang="en-US" sz="1700">
-                <a:solidFill>
-                  <a:srgbClr val="172036"/>
-                </a:solidFill>
-                <a:latin typeface="Inter"/>
-              </a:rPr>
-              <a:t>Replicas send compact binary updates.</a:t>
-            </a:r>
-            <a:endParaRPr lang="en-US" sz="1800"/>
-          </a:p>
-          <a:p>
-            <a:pPr algn="l" lvl="0">
-              <a:buChar char="•"/>
-            </a:pPr>
-            <a:r>
-              <a:rPr lang="en-US" sz="1700">
-                <a:solidFill>
-                  <a:srgbClr val="172036"/>
-                </a:solidFill>
-                <a:latin typeface="Inter"/>
-              </a:rPr>
-              <a:t>State vectors request only missing work.</a:t>
+              <a:rPr lang="en-US" sz="1500">
+                <a:solidFill>
+                  <a:srgbClr val="475467"/>
+                </a:solidFill>
+                <a:latin typeface="Arial"/>
+              </a:rPr>
+              <a:t>Every keystroke lands locally first. Peers exchange only updates, then converge on the same file.</a:t>
             </a:r>
             <a:endParaRPr lang="en-US" sz="1800"/>
           </a:p>
@@ -1544,14 +2593,14 @@
       </p:sp>
       <p:sp>
         <p:nvSpPr>
-          <p:cNvPr id="5" name="Converge"/>
+          <p:cNvPr id="6" name="Local first step"/>
           <p:cNvSpPr txBox="1"/>
           <p:nvPr/>
         </p:nvSpPr>
         <p:spPr>
           <a:xfrm>
-            <a:off x="8077200" y="1676400"/>
-            <a:ext cx="3200400" cy="2590800"/>
+            <a:off x="762000" y="3543300"/>
+            <a:ext cx="4953000" cy="685800"/>
           </a:xfrm>
           <a:prstGeom prst="roundRect">
             <a:avLst/>
@@ -1561,8 +2610,344 @@
           </a:solidFill>
           <a:ln w="19050">
             <a:solidFill>
-              <a:srgbClr val="F2D0C3"/>
+              <a:srgbClr val="D8E0FF"/>
             </a:solidFill>
+          </a:ln>
+        </p:spPr>
+        <p:txBody>
+          <a:bodyPr wrap="square" lIns="152400" tIns="91440" rIns="152400" bIns="91440" anchor="ctr"/>
+          <a:lstStyle/>
+          <a:p>
+            <a:pPr algn="l" lvl="0"/>
+            <a:r>
+              <a:rPr lang="en-US" sz="1200" b="1">
+                <a:solidFill>
+                  <a:srgbClr val="315EFB"/>
+                </a:solidFill>
+                <a:latin typeface="Arial"/>
+              </a:rPr>
+              <a:t>01</a:t>
+            </a:r>
+            <a:r>
+              <a:rPr lang="en-US" sz="1500" b="1">
+                <a:solidFill>
+                  <a:srgbClr val="101828"/>
+                </a:solidFill>
+                <a:latin typeface="Arial"/>
+              </a:rPr>
+              <a:t>   Edit locally</a:t>
+            </a:r>
+            <a:endParaRPr lang="en-US" sz="1800"/>
+          </a:p>
+          <a:p>
+            <a:pPr algn="l" lvl="0"/>
+            <a:r>
+              <a:rPr lang="en-US" sz="1000">
+                <a:solidFill>
+                  <a:srgbClr val="667085"/>
+                </a:solidFill>
+                <a:latin typeface="Arial"/>
+              </a:rPr>
+              <a:t>Resident model. Instant feedback.</a:t>
+            </a:r>
+            <a:endParaRPr lang="en-US" sz="1800"/>
+          </a:p>
+        </p:txBody>
+      </p:sp>
+      <p:sp>
+        <p:nvSpPr>
+          <p:cNvPr id="7" name="Exchange updates step"/>
+          <p:cNvSpPr txBox="1"/>
+          <p:nvPr/>
+        </p:nvSpPr>
+        <p:spPr>
+          <a:xfrm>
+            <a:off x="762000" y="4381500"/>
+            <a:ext cx="4953000" cy="685800"/>
+          </a:xfrm>
+          <a:prstGeom prst="roundRect">
+            <a:avLst/>
+          </a:prstGeom>
+          <a:solidFill>
+            <a:srgbClr val="FFFFFF"/>
+          </a:solidFill>
+          <a:ln w="19050">
+            <a:solidFill>
+              <a:srgbClr val="FFD0C4"/>
+            </a:solidFill>
+          </a:ln>
+        </p:spPr>
+        <p:txBody>
+          <a:bodyPr wrap="square" lIns="152400" tIns="91440" rIns="152400" bIns="91440" anchor="ctr"/>
+          <a:lstStyle/>
+          <a:p>
+            <a:pPr algn="l" lvl="0"/>
+            <a:r>
+              <a:rPr lang="en-US" sz="1200" b="1">
+                <a:solidFill>
+                  <a:srgbClr val="D94F35"/>
+                </a:solidFill>
+                <a:latin typeface="Arial"/>
+              </a:rPr>
+              <a:t>02</a:t>
+            </a:r>
+            <a:r>
+              <a:rPr lang="en-US" sz="1500" b="1">
+                <a:solidFill>
+                  <a:srgbClr val="101828"/>
+                </a:solidFill>
+                <a:latin typeface="Arial"/>
+              </a:rPr>
+              <a:t>   Exchange updates</a:t>
+            </a:r>
+            <a:endParaRPr lang="en-US" sz="1800"/>
+          </a:p>
+          <a:p>
+            <a:pPr algn="l" lvl="0"/>
+            <a:r>
+              <a:rPr lang="en-US" sz="1000">
+                <a:solidFill>
+                  <a:srgbClr val="667085"/>
+                </a:solidFill>
+                <a:latin typeface="Arial"/>
+              </a:rPr>
+              <a:t>Compact binary deltas. Nothing else.</a:t>
+            </a:r>
+            <a:endParaRPr lang="en-US" sz="1800"/>
+          </a:p>
+        </p:txBody>
+      </p:sp>
+      <p:sp>
+        <p:nvSpPr>
+          <p:cNvPr id="8" name="Converge step"/>
+          <p:cNvSpPr txBox="1"/>
+          <p:nvPr/>
+        </p:nvSpPr>
+        <p:spPr>
+          <a:xfrm>
+            <a:off x="762000" y="5219700"/>
+            <a:ext cx="4953000" cy="685800"/>
+          </a:xfrm>
+          <a:prstGeom prst="roundRect">
+            <a:avLst/>
+          </a:prstGeom>
+          <a:solidFill>
+            <a:srgbClr val="FFFFFF"/>
+          </a:solidFill>
+          <a:ln w="19050">
+            <a:solidFill>
+              <a:srgbClr val="B7E7D0"/>
+            </a:solidFill>
+          </a:ln>
+        </p:spPr>
+        <p:txBody>
+          <a:bodyPr wrap="square" lIns="152400" tIns="91440" rIns="152400" bIns="91440" anchor="ctr"/>
+          <a:lstStyle/>
+          <a:p>
+            <a:pPr algn="l" lvl="0"/>
+            <a:r>
+              <a:rPr lang="en-US" sz="1200" b="1">
+                <a:solidFill>
+                  <a:srgbClr val="16825D"/>
+                </a:solidFill>
+                <a:latin typeface="Arial"/>
+              </a:rPr>
+              <a:t>03</a:t>
+            </a:r>
+            <a:r>
+              <a:rPr lang="en-US" sz="1500" b="1">
+                <a:solidFill>
+                  <a:srgbClr val="101828"/>
+                </a:solidFill>
+                <a:latin typeface="Arial"/>
+              </a:rPr>
+              <a:t>   Converge everywhere</a:t>
+            </a:r>
+            <a:endParaRPr lang="en-US" sz="1800"/>
+          </a:p>
+          <a:p>
+            <a:pPr algn="l" lvl="0"/>
+            <a:r>
+              <a:rPr lang="en-US" sz="1000">
+                <a:solidFill>
+                  <a:srgbClr val="667085"/>
+                </a:solidFill>
+                <a:latin typeface="Arial"/>
+              </a:rPr>
+              <a:t>One state across every peer.</a:t>
+            </a:r>
+            <a:endParaRPr lang="en-US" sz="1800"/>
+          </a:p>
+        </p:txBody>
+      </p:sp>
+      <p:sp>
+        <p:nvSpPr>
+          <p:cNvPr id="20" name="Live session panel"/>
+          <p:cNvSpPr/>
+          <p:nvPr/>
+        </p:nvSpPr>
+        <p:spPr>
+          <a:xfrm>
+            <a:off x="6400800" y="609600"/>
+            <a:ext cx="5029200" cy="5486400"/>
+          </a:xfrm>
+          <a:prstGeom prst="roundRect">
+            <a:avLst/>
+          </a:prstGeom>
+          <a:solidFill>
+            <a:srgbClr val="FFFFFF"/>
+          </a:solidFill>
+          <a:ln w="19050">
+            <a:solidFill>
+              <a:srgbClr val="C7D1FF"/>
+            </a:solidFill>
+          </a:ln>
+        </p:spPr>
+      </p:sp>
+      <p:sp>
+        <p:nvSpPr>
+          <p:cNvPr id="21" name="Live session title"/>
+          <p:cNvSpPr txBox="1"/>
+          <p:nvPr/>
+        </p:nvSpPr>
+        <p:spPr>
+          <a:xfrm>
+            <a:off x="6781800" y="838200"/>
+            <a:ext cx="2362200" cy="457200"/>
+          </a:xfrm>
+          <a:prstGeom prst="rect">
+            <a:avLst/>
+          </a:prstGeom>
+          <a:noFill/>
+          <a:ln>
+            <a:noFill/>
+          </a:ln>
+        </p:spPr>
+        <p:txBody>
+          <a:bodyPr wrap="square" lIns="152400" tIns="91440" rIns="152400" bIns="91440" anchor="ctr"/>
+          <a:lstStyle/>
+          <a:p>
+            <a:pPr algn="l" lvl="0"/>
+            <a:r>
+              <a:rPr lang="en-US" sz="1200" b="1">
+                <a:solidFill>
+                  <a:srgbClr val="101828"/>
+                </a:solidFill>
+                <a:latin typeface="Arial"/>
+              </a:rPr>
+              <a:t>Q3 launch deck</a:t>
+            </a:r>
+            <a:endParaRPr lang="en-US" sz="1800"/>
+          </a:p>
+        </p:txBody>
+      </p:sp>
+      <p:sp>
+        <p:nvSpPr>
+          <p:cNvPr id="22" name="Peer one"/>
+          <p:cNvSpPr/>
+          <p:nvPr/>
+        </p:nvSpPr>
+        <p:spPr>
+          <a:xfrm>
+            <a:off x="10058400" y="838200"/>
+            <a:ext cx="342900" cy="342900"/>
+          </a:xfrm>
+          <a:prstGeom prst="ellipse">
+            <a:avLst/>
+          </a:prstGeom>
+          <a:solidFill>
+            <a:srgbClr val="315EFB"/>
+          </a:solidFill>
+          <a:ln>
+            <a:noFill/>
+          </a:ln>
+        </p:spPr>
+      </p:sp>
+      <p:sp>
+        <p:nvSpPr>
+          <p:cNvPr id="23" name="Peer two"/>
+          <p:cNvSpPr/>
+          <p:nvPr/>
+        </p:nvSpPr>
+        <p:spPr>
+          <a:xfrm>
+            <a:off x="10439400" y="838200"/>
+            <a:ext cx="342900" cy="342900"/>
+          </a:xfrm>
+          <a:prstGeom prst="ellipse">
+            <a:avLst/>
+          </a:prstGeom>
+          <a:solidFill>
+            <a:srgbClr val="FF8066"/>
+          </a:solidFill>
+          <a:ln>
+            <a:noFill/>
+          </a:ln>
+        </p:spPr>
+      </p:sp>
+      <p:sp>
+        <p:nvSpPr>
+          <p:cNvPr id="24" name="Peer three"/>
+          <p:cNvSpPr/>
+          <p:nvPr/>
+        </p:nvSpPr>
+        <p:spPr>
+          <a:xfrm>
+            <a:off x="10820400" y="838200"/>
+            <a:ext cx="342900" cy="342900"/>
+          </a:xfrm>
+          <a:prstGeom prst="ellipse">
+            <a:avLst/>
+          </a:prstGeom>
+          <a:solidFill>
+            <a:srgbClr val="48C78E"/>
+          </a:solidFill>
+          <a:ln>
+            <a:noFill/>
+          </a:ln>
+        </p:spPr>
+      </p:sp>
+      <p:sp>
+        <p:nvSpPr>
+          <p:cNvPr id="25" name="Shared canvas"/>
+          <p:cNvSpPr/>
+          <p:nvPr/>
+        </p:nvSpPr>
+        <p:spPr>
+          <a:xfrm>
+            <a:off x="6781800" y="1524000"/>
+            <a:ext cx="4267200" cy="3429000"/>
+          </a:xfrm>
+          <a:prstGeom prst="roundRect">
+            <a:avLst/>
+          </a:prstGeom>
+          <a:solidFill>
+            <a:srgbClr val="F8FAFC"/>
+          </a:solidFill>
+          <a:ln w="19050">
+            <a:solidFill>
+              <a:srgbClr val="E4E7EC"/>
+            </a:solidFill>
+          </a:ln>
+        </p:spPr>
+      </p:sp>
+      <p:sp>
+        <p:nvSpPr>
+          <p:cNvPr id="26" name="Shared canvas heading"/>
+          <p:cNvSpPr txBox="1"/>
+          <p:nvPr/>
+        </p:nvSpPr>
+        <p:spPr>
+          <a:xfrm>
+            <a:off x="7086600" y="1828800"/>
+            <a:ext cx="3048000" cy="533400"/>
+          </a:xfrm>
+          <a:prstGeom prst="rect">
+            <a:avLst/>
+          </a:prstGeom>
+          <a:noFill/>
+          <a:ln>
+            <a:noFill/>
           </a:ln>
         </p:spPr>
         <p:txBody>
@@ -1571,43 +2956,13 @@
           <a:p>
             <a:pPr algn="l" lvl="0"/>
             <a:r>
-              <a:rPr lang="en-US" sz="2000" b="1">
-                <a:solidFill>
-                  <a:srgbClr val="C65A2E"/>
-                </a:solidFill>
-                <a:latin typeface="Inter"/>
-              </a:rPr>
-              <a:t>03  Converge</a:t>
-            </a:r>
-            <a:endParaRPr lang="en-US" sz="1800"/>
-          </a:p>
-          <a:p>
-            <a:pPr algn="l" lvl="0">
-              <a:buChar char="•"/>
-            </a:pPr>
-            <a:r>
-              <a:rPr lang="en-US" sz="1700">
-                <a:solidFill>
-                  <a:srgbClr val="172036"/>
-                </a:solidFill>
-                <a:latin typeface="Inter"/>
-              </a:rPr>
-              <a:t>Slide order and text settle together.</a:t>
-            </a:r>
-            <a:endParaRPr lang="en-US" sz="1800"/>
-          </a:p>
-          <a:p>
-            <a:pPr algn="l" lvl="0">
-              <a:buChar char="•"/>
-            </a:pPr>
-            <a:r>
-              <a:rPr lang="en-US" sz="1700">
-                <a:solidFill>
-                  <a:srgbClr val="172036"/>
-                </a:solidFill>
-                <a:latin typeface="Inter"/>
-              </a:rPr>
-              <a:t>Rust reflows the same result everywhere.</a:t>
+              <a:rPr lang="en-US" sz="1800" b="1">
+                <a:solidFill>
+                  <a:srgbClr val="101828"/>
+                </a:solidFill>
+                <a:latin typeface="Arial"/>
+              </a:rPr>
+              <a:t>Launch narrative</a:t>
             </a:r>
             <a:endParaRPr lang="en-US" sz="1800"/>
           </a:p>
@@ -1615,20 +2970,108 @@
       </p:sp>
       <p:sp>
         <p:nvSpPr>
-          <p:cNvPr id="6" name="Closing statement"/>
+          <p:cNvPr id="27" name="Canvas line one"/>
+          <p:cNvSpPr/>
+          <p:nvPr/>
+        </p:nvSpPr>
+        <p:spPr>
+          <a:xfrm>
+            <a:off x="7086600" y="2590800"/>
+            <a:ext cx="2819400" cy="91440"/>
+          </a:xfrm>
+          <a:prstGeom prst="roundRect">
+            <a:avLst/>
+          </a:prstGeom>
+          <a:solidFill>
+            <a:srgbClr val="D0D5DD"/>
+          </a:solidFill>
+          <a:ln>
+            <a:noFill/>
+          </a:ln>
+        </p:spPr>
+      </p:sp>
+      <p:sp>
+        <p:nvSpPr>
+          <p:cNvPr id="28" name="Canvas line two"/>
+          <p:cNvSpPr/>
+          <p:nvPr/>
+        </p:nvSpPr>
+        <p:spPr>
+          <a:xfrm>
+            <a:off x="7086600" y="2819400"/>
+            <a:ext cx="2133600" cy="91440"/>
+          </a:xfrm>
+          <a:prstGeom prst="roundRect">
+            <a:avLst/>
+          </a:prstGeom>
+          <a:solidFill>
+            <a:srgbClr val="D0D5DD"/>
+          </a:solidFill>
+          <a:ln>
+            <a:noFill/>
+          </a:ln>
+        </p:spPr>
+      </p:sp>
+      <p:sp>
+        <p:nvSpPr>
+          <p:cNvPr id="29" name="Canvas card one"/>
+          <p:cNvSpPr/>
+          <p:nvPr/>
+        </p:nvSpPr>
+        <p:spPr>
+          <a:xfrm>
+            <a:off x="7086600" y="3352800"/>
+            <a:ext cx="1524000" cy="990600"/>
+          </a:xfrm>
+          <a:prstGeom prst="roundRect">
+            <a:avLst/>
+          </a:prstGeom>
+          <a:solidFill>
+            <a:srgbClr val="E6EBFF"/>
+          </a:solidFill>
+          <a:ln>
+            <a:noFill/>
+          </a:ln>
+        </p:spPr>
+      </p:sp>
+      <p:sp>
+        <p:nvSpPr>
+          <p:cNvPr id="30" name="Canvas card two"/>
+          <p:cNvSpPr/>
+          <p:nvPr/>
+        </p:nvSpPr>
+        <p:spPr>
+          <a:xfrm>
+            <a:off x="8839200" y="3352800"/>
+            <a:ext cx="1905000" cy="990600"/>
+          </a:xfrm>
+          <a:prstGeom prst="roundRect">
+            <a:avLst/>
+          </a:prstGeom>
+          <a:solidFill>
+            <a:srgbClr val="E7F8EF"/>
+          </a:solidFill>
+          <a:ln>
+            <a:noFill/>
+          </a:ln>
+        </p:spPr>
+      </p:sp>
+      <p:sp>
+        <p:nvSpPr>
+          <p:cNvPr id="31" name="You cursor"/>
           <p:cNvSpPr txBox="1"/>
           <p:nvPr/>
         </p:nvSpPr>
         <p:spPr>
           <a:xfrm>
-            <a:off x="1524000" y="4876800"/>
-            <a:ext cx="9144000" cy="1066800"/>
+            <a:off x="6934200" y="3048000"/>
+            <a:ext cx="762000" cy="381000"/>
           </a:xfrm>
           <a:prstGeom prst="roundRect">
             <a:avLst/>
           </a:prstGeom>
           <a:solidFill>
-            <a:srgbClr val="6254E7"/>
+            <a:srgbClr val="315EFB"/>
           </a:solidFill>
           <a:ln>
             <a:noFill/>
@@ -1640,13 +3083,135 @@
           <a:p>
             <a:pPr algn="ctr" lvl="0"/>
             <a:r>
-              <a:rPr lang="en-US" sz="2200" b="1">
+              <a:rPr lang="en-US" sz="800" b="1">
                 <a:solidFill>
                   <a:srgbClr val="FFFFFF"/>
                 </a:solidFill>
-                <a:latin typeface="Inter"/>
-              </a:rPr>
-              <a:t>The deck is collaborative before the first toolbar button exists.</a:t>
+                <a:latin typeface="Arial"/>
+              </a:rPr>
+              <a:t>YOU</a:t>
+            </a:r>
+            <a:endParaRPr lang="en-US" sz="1800"/>
+          </a:p>
+        </p:txBody>
+      </p:sp>
+      <p:sp>
+        <p:nvSpPr>
+          <p:cNvPr id="32" name="You cursor line"/>
+          <p:cNvSpPr/>
+          <p:nvPr/>
+        </p:nvSpPr>
+        <p:spPr>
+          <a:xfrm>
+            <a:off x="7315200" y="3390900"/>
+            <a:ext cx="15240" cy="762000"/>
+          </a:xfrm>
+          <a:prstGeom prst="rect">
+            <a:avLst/>
+          </a:prstGeom>
+          <a:solidFill>
+            <a:srgbClr val="315EFB"/>
+          </a:solidFill>
+          <a:ln>
+            <a:noFill/>
+          </a:ln>
+        </p:spPr>
+      </p:sp>
+      <p:sp>
+        <p:nvSpPr>
+          <p:cNvPr id="33" name="Maya cursor"/>
+          <p:cNvSpPr txBox="1"/>
+          <p:nvPr/>
+        </p:nvSpPr>
+        <p:spPr>
+          <a:xfrm>
+            <a:off x="9677400" y="2286000"/>
+            <a:ext cx="838200" cy="381000"/>
+          </a:xfrm>
+          <a:prstGeom prst="roundRect">
+            <a:avLst/>
+          </a:prstGeom>
+          <a:solidFill>
+            <a:srgbClr val="FF8066"/>
+          </a:solidFill>
+          <a:ln>
+            <a:noFill/>
+          </a:ln>
+        </p:spPr>
+        <p:txBody>
+          <a:bodyPr wrap="square" lIns="152400" tIns="91440" rIns="152400" bIns="91440" anchor="ctr"/>
+          <a:lstStyle/>
+          <a:p>
+            <a:pPr algn="ctr" lvl="0"/>
+            <a:r>
+              <a:rPr lang="en-US" sz="800" b="1">
+                <a:solidFill>
+                  <a:srgbClr val="101828"/>
+                </a:solidFill>
+                <a:latin typeface="Arial"/>
+              </a:rPr>
+              <a:t>MAYA</a:t>
+            </a:r>
+            <a:endParaRPr lang="en-US" sz="1800"/>
+          </a:p>
+        </p:txBody>
+      </p:sp>
+      <p:sp>
+        <p:nvSpPr>
+          <p:cNvPr id="34" name="Maya cursor line"/>
+          <p:cNvSpPr/>
+          <p:nvPr/>
+        </p:nvSpPr>
+        <p:spPr>
+          <a:xfrm>
+            <a:off x="10096500" y="2628900"/>
+            <a:ext cx="15240" cy="914400"/>
+          </a:xfrm>
+          <a:prstGeom prst="rect">
+            <a:avLst/>
+          </a:prstGeom>
+          <a:solidFill>
+            <a:srgbClr val="FF8066"/>
+          </a:solidFill>
+          <a:ln>
+            <a:noFill/>
+          </a:ln>
+        </p:spPr>
+      </p:sp>
+      <p:sp>
+        <p:nvSpPr>
+          <p:cNvPr id="35" name="Session status"/>
+          <p:cNvSpPr txBox="1"/>
+          <p:nvPr/>
+        </p:nvSpPr>
+        <p:spPr>
+          <a:xfrm>
+            <a:off x="6781800" y="5181600"/>
+            <a:ext cx="4267200" cy="533400"/>
+          </a:xfrm>
+          <a:prstGeom prst="roundRect">
+            <a:avLst/>
+          </a:prstGeom>
+          <a:solidFill>
+            <a:srgbClr val="C8F56A"/>
+          </a:solidFill>
+          <a:ln>
+            <a:noFill/>
+          </a:ln>
+        </p:spPr>
+        <p:txBody>
+          <a:bodyPr wrap="square" lIns="152400" tIns="91440" rIns="152400" bIns="91440" anchor="ctr"/>
+          <a:lstStyle/>
+          <a:p>
+            <a:pPr algn="ctr" lvl="0"/>
+            <a:r>
+              <a:rPr lang="en-US" sz="950" b="1">
+                <a:solidFill>
+                  <a:srgbClr val="101828"/>
+                </a:solidFill>
+                <a:latin typeface="Arial"/>
+              </a:rPr>
+              <a:t>3 peers  ·  synced  ·  local-first</a:t>
             </a:r>
             <a:endParaRPr lang="en-US" sz="1800"/>
           </a:p>
@@ -1665,50 +3230,50 @@
   <a:themeElements>
     <a:clrScheme name="BetterOffice">
       <a:dk1>
-        <a:srgbClr val="172036"/>
+        <a:srgbClr val="101828"/>
       </a:dk1>
       <a:lt1>
         <a:srgbClr val="FFFFFF"/>
       </a:lt1>
       <a:dk2>
-        <a:srgbClr val="241E52"/>
+        <a:srgbClr val="1D2939"/>
       </a:dk2>
       <a:lt2>
-        <a:srgbClr val="F7F8FC"/>
+        <a:srgbClr val="F8F7F2"/>
       </a:lt2>
       <a:accent1>
-        <a:srgbClr val="6254E7"/>
+        <a:srgbClr val="315EFB"/>
       </a:accent1>
       <a:accent2>
-        <a:srgbClr val="2B8A78"/>
+        <a:srgbClr val="16825D"/>
       </a:accent2>
       <a:accent3>
-        <a:srgbClr val="C65A2E"/>
+        <a:srgbClr val="D94F35"/>
       </a:accent3>
       <a:accent4>
-        <a:srgbClr val="4A3FB5"/>
+        <a:srgbClr val="C8F56A"/>
       </a:accent4>
       <a:accent5>
-        <a:srgbClr val="D9D5FF"/>
+        <a:srgbClr val="8AB4FF"/>
       </a:accent5>
       <a:accent6>
-        <a:srgbClr val="5C6478"/>
+        <a:srgbClr val="667085"/>
       </a:accent6>
       <a:hlink>
-        <a:srgbClr val="6254E7"/>
+        <a:srgbClr val="315EFB"/>
       </a:hlink>
       <a:folHlink>
-        <a:srgbClr val="4A3FB5"/>
+        <a:srgbClr val="5D6DCB"/>
       </a:folHlink>
     </a:clrScheme>
     <a:fontScheme name="BetterOffice">
       <a:majorFont>
-        <a:latin typeface="Inter"/>
+        <a:latin typeface="Arial"/>
         <a:ea typeface=""/>
         <a:cs typeface=""/>
       </a:majorFont>
       <a:minorFont>
-        <a:latin typeface="Inter"/>
+        <a:latin typeface="Arial"/>
         <a:ea typeface=""/>
         <a:cs typeface=""/>
       </a:minorFont>
@@ -1718,6 +3283,12 @@
         <a:solidFill>
           <a:schemeClr val="phClr"/>
         </a:solidFill>
+        <a:solidFill>
+          <a:schemeClr val="phClr"/>
+        </a:solidFill>
+        <a:solidFill>
+          <a:schemeClr val="phClr"/>
+        </a:solidFill>
       </a:fillStyleLst>
       <a:lnStyleLst>
         <a:ln w="19050">
@@ -1725,8 +3296,24 @@
             <a:schemeClr val="phClr"/>
           </a:solidFill>
         </a:ln>
+        <a:ln w="25400">
+          <a:solidFill>
+            <a:schemeClr val="phClr"/>
+          </a:solidFill>
+        </a:ln>
+        <a:ln w="38100">
+          <a:solidFill>
+            <a:schemeClr val="phClr"/>
+          </a:solidFill>
+        </a:ln>
       </a:lnStyleLst>
       <a:effectStyleLst>
+        <a:effectStyle>
+          <a:effectLst/>
+        </a:effectStyle>
+        <a:effectStyle>
+          <a:effectLst/>
+        </a:effectStyle>
         <a:effectStyle>
           <a:effectLst/>
         </a:effectStyle>
@@ -1735,6 +3322,12 @@
         <a:solidFill>
           <a:schemeClr val="phClr"/>
         </a:solidFill>
+        <a:solidFill>
+          <a:schemeClr val="phClr"/>
+        </a:solidFill>
+        <a:solidFill>
+          <a:schemeClr val="phClr"/>
+        </a:solidFill>
       </a:bgFillStyleLst>
     </a:fmtScheme>
   </a:themeElements>
